--- a/на всякий случай/Самсыка/Презентация_СамсыкаРМ.pptx
+++ b/на всякий случай/Самсыка/Презентация_СамсыкаРМ.pptx
@@ -5,7 +5,7 @@
     <p:sldMasterId id="2147483648" r:id="rId1"/>
   </p:sldMasterIdLst>
   <p:notesMasterIdLst>
-    <p:notesMasterId r:id="rId18"/>
+    <p:notesMasterId r:id="rId20"/>
   </p:notesMasterIdLst>
   <p:sldIdLst>
     <p:sldId id="256" r:id="rId2"/>
@@ -18,12 +18,14 @@
     <p:sldId id="264" r:id="rId9"/>
     <p:sldId id="266" r:id="rId10"/>
     <p:sldId id="267" r:id="rId11"/>
-    <p:sldId id="268" r:id="rId12"/>
-    <p:sldId id="269" r:id="rId13"/>
-    <p:sldId id="270" r:id="rId14"/>
-    <p:sldId id="271" r:id="rId15"/>
-    <p:sldId id="274" r:id="rId16"/>
-    <p:sldId id="273" r:id="rId17"/>
+    <p:sldId id="275" r:id="rId12"/>
+    <p:sldId id="268" r:id="rId13"/>
+    <p:sldId id="269" r:id="rId14"/>
+    <p:sldId id="270" r:id="rId15"/>
+    <p:sldId id="276" r:id="rId16"/>
+    <p:sldId id="271" r:id="rId17"/>
+    <p:sldId id="273" r:id="rId18"/>
+    <p:sldId id="274" r:id="rId19"/>
   </p:sldIdLst>
   <p:sldSz cx="12192000" cy="6858000"/>
   <p:notesSz cx="6858000" cy="9144000"/>
@@ -212,7 +214,7 @@
           <a:p>
             <a:fld id="{621C7ACB-FA9E-42A1-AA12-D7D6CBE870C6}" type="datetimeFigureOut">
               <a:rPr lang="ru-RU" smtClean="0"/>
-              <a:t>21.05.2026</a:t>
+              <a:t>06.06.2026</a:t>
             </a:fld>
             <a:endParaRPr lang="ru-RU"/>
           </a:p>
@@ -629,7 +631,7 @@
                 <a:ea typeface="+mn-ea"/>
                 <a:cs typeface="+mn-cs"/>
               </a:rPr>
-              <a:t>Кладовщик видит все продукты. Может увеличить количество при поставке, уменьшить при списании или установить точное число. Изменения сразу отправляются на сервер и синхронизируются с другими клиентами.</a:t>
+              <a:t>Официант выбирает блюдо, указывает количество. Система проверяет: хватает ли продуктов? Если да – списывает и добавляет в корзину. При удалении – возвращает продукты на склад. Это всё в одной транзакции.</a:t>
             </a:r>
             <a:endParaRPr lang="ru-RU" i="1" dirty="0"/>
           </a:p>
@@ -661,7 +663,7 @@
     </p:spTree>
     <p:extLst>
       <p:ext uri="{BB962C8B-B14F-4D97-AF65-F5344CB8AC3E}">
-        <p14:creationId xmlns:p14="http://schemas.microsoft.com/office/powerpoint/2010/main" val="3836431280"/>
+        <p14:creationId xmlns:p14="http://schemas.microsoft.com/office/powerpoint/2010/main" val="27322560"/>
       </p:ext>
     </p:extLst>
   </p:cSld>
@@ -725,31 +727,7 @@
                 <a:ea typeface="+mn-ea"/>
                 <a:cs typeface="+mn-cs"/>
               </a:rPr>
-              <a:t>Администратор может посмотреть выручку за период, разбивку по дням, популярность блюд и список дефицитных продуктов. Отчёт можно сохранить в CSV и открыть в </a:t>
-            </a:r>
-            <a:r>
-              <a:rPr lang="ru-RU" sz="1200" b="0" i="1" kern="1200" dirty="0" err="1">
-                <a:solidFill>
-                  <a:schemeClr val="tx1"/>
-                </a:solidFill>
-                <a:effectLst/>
-                <a:latin typeface="+mn-lt"/>
-                <a:ea typeface="+mn-ea"/>
-                <a:cs typeface="+mn-cs"/>
-              </a:rPr>
-              <a:t>Excel</a:t>
-            </a:r>
-            <a:r>
-              <a:rPr lang="ru-RU" sz="1200" b="0" i="1" kern="1200" dirty="0">
-                <a:solidFill>
-                  <a:schemeClr val="tx1"/>
-                </a:solidFill>
-                <a:effectLst/>
-                <a:latin typeface="+mn-lt"/>
-                <a:ea typeface="+mn-ea"/>
-                <a:cs typeface="+mn-cs"/>
-              </a:rPr>
-              <a:t>.</a:t>
+              <a:t>Кладовщик видит все продукты. Может увеличить количество при поставке, уменьшить при списании или установить точное число. Изменения сразу отправляются на сервер и синхронизируются с другими клиентами.</a:t>
             </a:r>
             <a:endParaRPr lang="ru-RU" i="1" dirty="0"/>
           </a:p>
@@ -781,7 +759,7 @@
     </p:spTree>
     <p:extLst>
       <p:ext uri="{BB962C8B-B14F-4D97-AF65-F5344CB8AC3E}">
-        <p14:creationId xmlns:p14="http://schemas.microsoft.com/office/powerpoint/2010/main" val="1832135440"/>
+        <p14:creationId xmlns:p14="http://schemas.microsoft.com/office/powerpoint/2010/main" val="3836431280"/>
       </p:ext>
     </p:extLst>
   </p:cSld>
@@ -845,9 +823,33 @@
                 <a:ea typeface="+mn-ea"/>
                 <a:cs typeface="+mn-cs"/>
               </a:rPr>
-              <a:t>Для C++ модулей написаны тесты. Например, проверка таймаута клиента, сохранение настроек. Функциональные тесты проверяют сценарии пользователей – все успешно, ошибок не выявлено.</a:t>
-            </a:r>
-            <a:endParaRPr lang="ru-RU" dirty="0"/>
+              <a:t>Администратор может посмотреть выручку за период, разбивку по дням, популярность блюд и список дефицитных продуктов. Отчёт можно сохранить в CSV и открыть в </a:t>
+            </a:r>
+            <a:r>
+              <a:rPr lang="ru-RU" sz="1200" b="0" i="1" kern="1200" dirty="0" err="1">
+                <a:solidFill>
+                  <a:schemeClr val="tx1"/>
+                </a:solidFill>
+                <a:effectLst/>
+                <a:latin typeface="+mn-lt"/>
+                <a:ea typeface="+mn-ea"/>
+                <a:cs typeface="+mn-cs"/>
+              </a:rPr>
+              <a:t>Excel</a:t>
+            </a:r>
+            <a:r>
+              <a:rPr lang="ru-RU" sz="1200" b="0" i="1" kern="1200" dirty="0">
+                <a:solidFill>
+                  <a:schemeClr val="tx1"/>
+                </a:solidFill>
+                <a:effectLst/>
+                <a:latin typeface="+mn-lt"/>
+                <a:ea typeface="+mn-ea"/>
+                <a:cs typeface="+mn-cs"/>
+              </a:rPr>
+              <a:t>.</a:t>
+            </a:r>
+            <a:endParaRPr lang="ru-RU" i="1" dirty="0"/>
           </a:p>
         </p:txBody>
       </p:sp>
@@ -877,7 +879,7 @@
     </p:spTree>
     <p:extLst>
       <p:ext uri="{BB962C8B-B14F-4D97-AF65-F5344CB8AC3E}">
-        <p14:creationId xmlns:p14="http://schemas.microsoft.com/office/powerpoint/2010/main" val="3302503402"/>
+        <p14:creationId xmlns:p14="http://schemas.microsoft.com/office/powerpoint/2010/main" val="1832135440"/>
       </p:ext>
     </p:extLst>
   </p:cSld>
@@ -931,19 +933,7 @@
           <a:bodyPr/>
           <a:lstStyle/>
           <a:p>
-            <a:r>
-              <a:rPr lang="ru-RU" sz="1200" b="0" i="1" kern="1200" dirty="0">
-                <a:solidFill>
-                  <a:schemeClr val="tx1"/>
-                </a:solidFill>
-                <a:effectLst/>
-                <a:latin typeface="+mn-lt"/>
-                <a:ea typeface="+mn-ea"/>
-                <a:cs typeface="+mn-cs"/>
-              </a:rPr>
-              <a:t>Расчёт сделан по методике Рахматуллина. Учтены зарплата разработчика, отчисления, электроэнергия. Внедрение сократит время обработки заказа, уменьшит потери продуктов, поэтому окупаемость – менее двух лет. Средний показатель окупаемости в России: 3 года. </a:t>
-            </a:r>
-            <a:endParaRPr lang="ru-RU" dirty="0"/>
+            <a:endParaRPr lang="ru-RU" i="1" dirty="0"/>
           </a:p>
         </p:txBody>
       </p:sp>
@@ -973,7 +963,7 @@
     </p:spTree>
     <p:extLst>
       <p:ext uri="{BB962C8B-B14F-4D97-AF65-F5344CB8AC3E}">
-        <p14:creationId xmlns:p14="http://schemas.microsoft.com/office/powerpoint/2010/main" val="2738722000"/>
+        <p14:creationId xmlns:p14="http://schemas.microsoft.com/office/powerpoint/2010/main" val="3672564927"/>
       </p:ext>
     </p:extLst>
   </p:cSld>
@@ -1037,10 +1027,94 @@
                 <a:ea typeface="+mn-ea"/>
                 <a:cs typeface="+mn-cs"/>
               </a:rPr>
-              <a:t>В результате создан готовый продукт, который можно внедрять. В будущем можно добавить интернет-заказы и </a:t>
-            </a:r>
-            <a:r>
-              <a:rPr lang="ru-RU" sz="1200" b="0" i="1" kern="1200" dirty="0" err="1">
+              <a:t>Для C++ модулей написаны тесты. Например, проверка таймаута клиента, сохранение настроек. Функциональные тесты проверяют сценарии пользователей – все успешно, ошибок не выявлено.</a:t>
+            </a:r>
+            <a:endParaRPr lang="ru-RU" dirty="0"/>
+          </a:p>
+        </p:txBody>
+      </p:sp>
+      <p:sp>
+        <p:nvSpPr>
+          <p:cNvPr id="4" name="Номер слайда 3"/>
+          <p:cNvSpPr>
+            <a:spLocks noGrp="1"/>
+          </p:cNvSpPr>
+          <p:nvPr>
+            <p:ph type="sldNum" sz="quarter" idx="5"/>
+          </p:nvPr>
+        </p:nvSpPr>
+        <p:spPr/>
+        <p:txBody>
+          <a:bodyPr/>
+          <a:lstStyle/>
+          <a:p>
+            <a:fld id="{CB7AE29D-09B4-4359-811B-DFCB091DCDDC}" type="slidenum">
+              <a:rPr lang="ru-RU" smtClean="0"/>
+              <a:t>16</a:t>
+            </a:fld>
+            <a:endParaRPr lang="ru-RU"/>
+          </a:p>
+        </p:txBody>
+      </p:sp>
+    </p:spTree>
+    <p:extLst>
+      <p:ext uri="{BB962C8B-B14F-4D97-AF65-F5344CB8AC3E}">
+        <p14:creationId xmlns:p14="http://schemas.microsoft.com/office/powerpoint/2010/main" val="3302503402"/>
+      </p:ext>
+    </p:extLst>
+  </p:cSld>
+  <p:clrMapOvr>
+    <a:masterClrMapping/>
+  </p:clrMapOvr>
+</p:notes>
+</file>
+
+<file path=ppt/notesSlides/notesSlide15.xml><?xml version="1.0" encoding="utf-8"?>
+<p:notes xmlns:a="http://schemas.openxmlformats.org/drawingml/2006/main" xmlns:r="http://schemas.openxmlformats.org/officeDocument/2006/relationships" xmlns:p="http://schemas.openxmlformats.org/presentationml/2006/main">
+  <p:cSld>
+    <p:spTree>
+      <p:nvGrpSpPr>
+        <p:cNvPr id="1" name=""/>
+        <p:cNvGrpSpPr/>
+        <p:nvPr/>
+      </p:nvGrpSpPr>
+      <p:grpSpPr>
+        <a:xfrm>
+          <a:off x="0" y="0"/>
+          <a:ext cx="0" cy="0"/>
+          <a:chOff x="0" y="0"/>
+          <a:chExt cx="0" cy="0"/>
+        </a:xfrm>
+      </p:grpSpPr>
+      <p:sp>
+        <p:nvSpPr>
+          <p:cNvPr id="2" name="Образ слайда 1"/>
+          <p:cNvSpPr>
+            <a:spLocks noGrp="1" noRot="1" noChangeAspect="1"/>
+          </p:cNvSpPr>
+          <p:nvPr>
+            <p:ph type="sldImg"/>
+          </p:nvPr>
+        </p:nvSpPr>
+        <p:spPr/>
+      </p:sp>
+      <p:sp>
+        <p:nvSpPr>
+          <p:cNvPr id="3" name="Заметки 2"/>
+          <p:cNvSpPr>
+            <a:spLocks noGrp="1"/>
+          </p:cNvSpPr>
+          <p:nvPr>
+            <p:ph type="body" idx="1"/>
+          </p:nvPr>
+        </p:nvSpPr>
+        <p:spPr/>
+        <p:txBody>
+          <a:bodyPr/>
+          <a:lstStyle/>
+          <a:p>
+            <a:r>
+              <a:rPr lang="ru-RU" sz="1200" b="0" i="1" kern="1200" dirty="0">
                 <a:solidFill>
                   <a:schemeClr val="tx1"/>
                 </a:solidFill>
@@ -1049,10 +1123,10 @@
                 <a:ea typeface="+mn-ea"/>
                 <a:cs typeface="+mn-cs"/>
               </a:rPr>
-              <a:t>push</a:t>
-            </a:r>
-            <a:r>
-              <a:rPr lang="ru-RU" sz="1200" b="0" i="1" kern="1200" dirty="0">
+              <a:t>В результате создан готовый продукт, который можно внедрять. В будущем можно добавить интернет-заказы и </a:t>
+            </a:r>
+            <a:r>
+              <a:rPr lang="ru-RU" sz="1200" b="0" i="1" kern="1200" dirty="0" err="1">
                 <a:solidFill>
                   <a:schemeClr val="tx1"/>
                 </a:solidFill>
@@ -1061,6 +1135,18 @@
                 <a:ea typeface="+mn-ea"/>
                 <a:cs typeface="+mn-cs"/>
               </a:rPr>
+              <a:t>push</a:t>
+            </a:r>
+            <a:r>
+              <a:rPr lang="ru-RU" sz="1200" b="0" i="1" kern="1200" dirty="0">
+                <a:solidFill>
+                  <a:schemeClr val="tx1"/>
+                </a:solidFill>
+                <a:effectLst/>
+                <a:latin typeface="+mn-lt"/>
+                <a:ea typeface="+mn-ea"/>
+                <a:cs typeface="+mn-cs"/>
+              </a:rPr>
               <a:t>-уведомления для поваров. Спасибо за внимание, готов ответить на вопросы.</a:t>
             </a:r>
             <a:endParaRPr lang="ru-RU" dirty="0"/>
@@ -1084,7 +1170,7 @@
           <a:p>
             <a:fld id="{CB7AE29D-09B4-4359-811B-DFCB091DCDDC}" type="slidenum">
               <a:rPr lang="ru-RU" smtClean="0"/>
-              <a:t>16</a:t>
+              <a:t>17</a:t>
             </a:fld>
             <a:endParaRPr lang="ru-RU"/>
           </a:p>
@@ -1812,7 +1898,7 @@
                 <a:ea typeface="+mn-ea"/>
                 <a:cs typeface="+mn-cs"/>
               </a:rPr>
-              <a:t>Пользователь вводит логин и пароль – система определяет роль. В настройках можно переключить режим: если «сервер» – приложение само работает с БД и принимает подключения; если «клиент» – подключается к другому устройству.</a:t>
+              <a:t>Пользователь вводит логин и пароль – система определяет роль. От роли зависит меню.</a:t>
             </a:r>
             <a:endParaRPr lang="ru-RU" i="1" dirty="0"/>
           </a:p>
@@ -1898,18 +1984,6 @@
           <a:bodyPr/>
           <a:lstStyle/>
           <a:p>
-            <a:r>
-              <a:rPr lang="ru-RU" sz="1200" b="0" i="1" kern="1200" dirty="0">
-                <a:solidFill>
-                  <a:schemeClr val="tx1"/>
-                </a:solidFill>
-                <a:effectLst/>
-                <a:latin typeface="+mn-lt"/>
-                <a:ea typeface="+mn-ea"/>
-                <a:cs typeface="+mn-cs"/>
-              </a:rPr>
-              <a:t>Официант выбирает блюдо, указывает количество. Система проверяет: хватает ли продуктов? Если да – списывает и добавляет в корзину. При удалении – возвращает продукты на склад. Это всё в одной транзакции.</a:t>
-            </a:r>
             <a:endParaRPr lang="ru-RU" i="1" dirty="0"/>
           </a:p>
         </p:txBody>
@@ -1940,7 +2014,7 @@
     </p:spTree>
     <p:extLst>
       <p:ext uri="{BB962C8B-B14F-4D97-AF65-F5344CB8AC3E}">
-        <p14:creationId xmlns:p14="http://schemas.microsoft.com/office/powerpoint/2010/main" val="27322560"/>
+        <p14:creationId xmlns:p14="http://schemas.microsoft.com/office/powerpoint/2010/main" val="3283548481"/>
       </p:ext>
     </p:extLst>
   </p:cSld>
@@ -2097,7 +2171,7 @@
           <a:p>
             <a:fld id="{4CFBE37F-C4B8-43B9-BE66-EA3945D99641}" type="datetimeFigureOut">
               <a:rPr lang="ru-RU" smtClean="0"/>
-              <a:t>21.05.2026</a:t>
+              <a:t>06.06.2026</a:t>
             </a:fld>
             <a:endParaRPr lang="ru-RU"/>
           </a:p>
@@ -2295,7 +2369,7 @@
           <a:p>
             <a:fld id="{4CFBE37F-C4B8-43B9-BE66-EA3945D99641}" type="datetimeFigureOut">
               <a:rPr lang="ru-RU" smtClean="0"/>
-              <a:t>21.05.2026</a:t>
+              <a:t>06.06.2026</a:t>
             </a:fld>
             <a:endParaRPr lang="ru-RU"/>
           </a:p>
@@ -2503,7 +2577,7 @@
           <a:p>
             <a:fld id="{4CFBE37F-C4B8-43B9-BE66-EA3945D99641}" type="datetimeFigureOut">
               <a:rPr lang="ru-RU" smtClean="0"/>
-              <a:t>21.05.2026</a:t>
+              <a:t>06.06.2026</a:t>
             </a:fld>
             <a:endParaRPr lang="ru-RU"/>
           </a:p>
@@ -2701,7 +2775,7 @@
           <a:p>
             <a:fld id="{4CFBE37F-C4B8-43B9-BE66-EA3945D99641}" type="datetimeFigureOut">
               <a:rPr lang="ru-RU" smtClean="0"/>
-              <a:t>21.05.2026</a:t>
+              <a:t>06.06.2026</a:t>
             </a:fld>
             <a:endParaRPr lang="ru-RU"/>
           </a:p>
@@ -2976,7 +3050,7 @@
           <a:p>
             <a:fld id="{4CFBE37F-C4B8-43B9-BE66-EA3945D99641}" type="datetimeFigureOut">
               <a:rPr lang="ru-RU" smtClean="0"/>
-              <a:t>21.05.2026</a:t>
+              <a:t>06.06.2026</a:t>
             </a:fld>
             <a:endParaRPr lang="ru-RU"/>
           </a:p>
@@ -3241,7 +3315,7 @@
           <a:p>
             <a:fld id="{4CFBE37F-C4B8-43B9-BE66-EA3945D99641}" type="datetimeFigureOut">
               <a:rPr lang="ru-RU" smtClean="0"/>
-              <a:t>21.05.2026</a:t>
+              <a:t>06.06.2026</a:t>
             </a:fld>
             <a:endParaRPr lang="ru-RU"/>
           </a:p>
@@ -3653,7 +3727,7 @@
           <a:p>
             <a:fld id="{4CFBE37F-C4B8-43B9-BE66-EA3945D99641}" type="datetimeFigureOut">
               <a:rPr lang="ru-RU" smtClean="0"/>
-              <a:t>21.05.2026</a:t>
+              <a:t>06.06.2026</a:t>
             </a:fld>
             <a:endParaRPr lang="ru-RU"/>
           </a:p>
@@ -3794,7 +3868,7 @@
           <a:p>
             <a:fld id="{4CFBE37F-C4B8-43B9-BE66-EA3945D99641}" type="datetimeFigureOut">
               <a:rPr lang="ru-RU" smtClean="0"/>
-              <a:t>21.05.2026</a:t>
+              <a:t>06.06.2026</a:t>
             </a:fld>
             <a:endParaRPr lang="ru-RU"/>
           </a:p>
@@ -3907,7 +3981,7 @@
           <a:p>
             <a:fld id="{4CFBE37F-C4B8-43B9-BE66-EA3945D99641}" type="datetimeFigureOut">
               <a:rPr lang="ru-RU" smtClean="0"/>
-              <a:t>21.05.2026</a:t>
+              <a:t>06.06.2026</a:t>
             </a:fld>
             <a:endParaRPr lang="ru-RU"/>
           </a:p>
@@ -4218,7 +4292,7 @@
           <a:p>
             <a:fld id="{4CFBE37F-C4B8-43B9-BE66-EA3945D99641}" type="datetimeFigureOut">
               <a:rPr lang="ru-RU" smtClean="0"/>
-              <a:t>21.05.2026</a:t>
+              <a:t>06.06.2026</a:t>
             </a:fld>
             <a:endParaRPr lang="ru-RU"/>
           </a:p>
@@ -4506,7 +4580,7 @@
           <a:p>
             <a:fld id="{4CFBE37F-C4B8-43B9-BE66-EA3945D99641}" type="datetimeFigureOut">
               <a:rPr lang="ru-RU" smtClean="0"/>
-              <a:t>21.05.2026</a:t>
+              <a:t>06.06.2026</a:t>
             </a:fld>
             <a:endParaRPr lang="ru-RU"/>
           </a:p>
@@ -4750,7 +4824,7 @@
           <a:p>
             <a:fld id="{4CFBE37F-C4B8-43B9-BE66-EA3945D99641}" type="datetimeFigureOut">
               <a:rPr lang="ru-RU" smtClean="0"/>
-              <a:t>21.05.2026</a:t>
+              <a:t>06.06.2026</a:t>
             </a:fld>
             <a:endParaRPr lang="ru-RU"/>
           </a:p>
@@ -5785,7 +5859,7 @@
                 </a:solidFill>
                 <a:latin typeface="+mn-lt"/>
               </a:rPr>
-              <a:t>Демонстрация: окно авторизации и настройки</a:t>
+              <a:t>Демонстрация: окно авторизации и меню</a:t>
             </a:r>
           </a:p>
         </p:txBody>
@@ -5812,53 +5886,13 @@
               </a:ext>
             </a:extLst>
           </a:blip>
-          <a:srcRect l="13803" t="6049" r="14112" b="5890"/>
+          <a:srcRect l="20067" t="8116" r="20705" b="5891"/>
           <a:stretch/>
         </p:blipFill>
         <p:spPr>
           <a:xfrm>
-            <a:off x="115503" y="1856717"/>
-            <a:ext cx="5130265" cy="4649962"/>
-          </a:xfrm>
-          <a:prstGeom prst="rect">
-            <a:avLst/>
-          </a:prstGeom>
-          <a:ln w="25400">
-            <a:solidFill>
-              <a:srgbClr val="191923"/>
-            </a:solidFill>
-          </a:ln>
-        </p:spPr>
-      </p:pic>
-      <p:pic>
-        <p:nvPicPr>
-          <p:cNvPr id="10" name="Рисунок 9">
-            <a:extLst>
-              <a:ext uri="{FF2B5EF4-FFF2-40B4-BE49-F238E27FC236}">
-                <a16:creationId xmlns:a16="http://schemas.microsoft.com/office/drawing/2014/main" id="{DF455436-BF8D-4098-9CAB-9B2255CFF8E1}"/>
-              </a:ext>
-            </a:extLst>
-          </p:cNvPr>
-          <p:cNvPicPr>
-            <a:picLocks noChangeAspect="1"/>
-          </p:cNvPicPr>
-          <p:nvPr/>
-        </p:nvPicPr>
-        <p:blipFill rotWithShape="1">
-          <a:blip r:embed="rId4">
-            <a:extLst>
-              <a:ext uri="{28A0092B-C50C-407E-A947-70E740481C1C}">
-                <a14:useLocalDpi xmlns:a14="http://schemas.microsoft.com/office/drawing/2010/main" val="0"/>
-              </a:ext>
-            </a:extLst>
-          </a:blip>
-          <a:srcRect l="9534" t="14597" r="8624" b="11018"/>
-          <a:stretch/>
-        </p:blipFill>
-        <p:spPr>
-          <a:xfrm>
-            <a:off x="5505137" y="1856717"/>
-            <a:ext cx="6571360" cy="4649962"/>
+            <a:off x="291951" y="959028"/>
+            <a:ext cx="5630781" cy="5745082"/>
           </a:xfrm>
           <a:prstGeom prst="rect">
             <a:avLst/>
@@ -5870,6 +5904,98 @@
           </a:ln>
         </p:spPr>
       </p:pic>
+      <p:pic>
+        <p:nvPicPr>
+          <p:cNvPr id="4" name="Рисунок 3">
+            <a:extLst>
+              <a:ext uri="{FF2B5EF4-FFF2-40B4-BE49-F238E27FC236}">
+                <a16:creationId xmlns:a16="http://schemas.microsoft.com/office/drawing/2014/main" id="{380CA55E-9130-41B6-BD0A-D2C45DF006B4}"/>
+              </a:ext>
+            </a:extLst>
+          </p:cNvPr>
+          <p:cNvPicPr>
+            <a:picLocks noChangeAspect="1"/>
+          </p:cNvPicPr>
+          <p:nvPr/>
+        </p:nvPicPr>
+        <p:blipFill rotWithShape="1">
+          <a:blip r:embed="rId4">
+            <a:extLst>
+              <a:ext uri="{28A0092B-C50C-407E-A947-70E740481C1C}">
+                <a14:useLocalDpi xmlns:a14="http://schemas.microsoft.com/office/drawing/2010/main" val="0"/>
+              </a:ext>
+            </a:extLst>
+          </a:blip>
+          <a:srcRect r="39263"/>
+          <a:stretch/>
+        </p:blipFill>
+        <p:spPr>
+          <a:xfrm>
+            <a:off x="7262778" y="959028"/>
+            <a:ext cx="4637271" cy="5745082"/>
+          </a:xfrm>
+          <a:prstGeom prst="rect">
+            <a:avLst/>
+          </a:prstGeom>
+          <a:ln w="25400">
+            <a:solidFill>
+              <a:srgbClr val="0F79B3"/>
+            </a:solidFill>
+          </a:ln>
+        </p:spPr>
+      </p:pic>
+      <p:sp>
+        <p:nvSpPr>
+          <p:cNvPr id="5" name="Стрелка: вправо 4">
+            <a:extLst>
+              <a:ext uri="{FF2B5EF4-FFF2-40B4-BE49-F238E27FC236}">
+                <a16:creationId xmlns:a16="http://schemas.microsoft.com/office/drawing/2014/main" id="{0F63B548-7E3E-434A-8BF7-A4A167E7456C}"/>
+              </a:ext>
+            </a:extLst>
+          </p:cNvPr>
+          <p:cNvSpPr/>
+          <p:nvPr/>
+        </p:nvSpPr>
+        <p:spPr>
+          <a:xfrm>
+            <a:off x="5922732" y="6208295"/>
+            <a:ext cx="1340046" cy="346509"/>
+          </a:xfrm>
+          <a:prstGeom prst="rightArrow">
+            <a:avLst/>
+          </a:prstGeom>
+          <a:solidFill>
+            <a:srgbClr val="0F79B3"/>
+          </a:solidFill>
+          <a:ln>
+            <a:noFill/>
+          </a:ln>
+        </p:spPr>
+        <p:style>
+          <a:lnRef idx="2">
+            <a:schemeClr val="accent1">
+              <a:shade val="50000"/>
+            </a:schemeClr>
+          </a:lnRef>
+          <a:fillRef idx="1">
+            <a:schemeClr val="accent1"/>
+          </a:fillRef>
+          <a:effectRef idx="0">
+            <a:schemeClr val="accent1"/>
+          </a:effectRef>
+          <a:fontRef idx="minor">
+            <a:schemeClr val="lt1"/>
+          </a:fontRef>
+        </p:style>
+        <p:txBody>
+          <a:bodyPr rtlCol="0" anchor="ctr"/>
+          <a:lstStyle/>
+          <a:p>
+            <a:pPr algn="ctr"/>
+            <a:endParaRPr lang="ru-RU"/>
+          </a:p>
+        </p:txBody>
+      </p:sp>
     </p:spTree>
     <p:extLst>
       <p:ext uri="{BB962C8B-B14F-4D97-AF65-F5344CB8AC3E}">
@@ -5919,7 +6045,7 @@
         <p:spPr>
           <a:xfrm>
             <a:off x="-1" y="0"/>
-            <a:ext cx="12192000" cy="798897"/>
+            <a:ext cx="12192000" cy="818147"/>
           </a:xfrm>
         </p:spPr>
         <p:txBody>
@@ -5933,17 +6059,17 @@
                 </a:solidFill>
                 <a:latin typeface="+mn-lt"/>
               </a:rPr>
-              <a:t>Демонстрация: оформление заказа (официант)</a:t>
+              <a:t>Демонстрация: окно настроек</a:t>
             </a:r>
           </a:p>
         </p:txBody>
       </p:sp>
       <p:pic>
         <p:nvPicPr>
-          <p:cNvPr id="4" name="Рисунок 3">
-            <a:extLst>
-              <a:ext uri="{FF2B5EF4-FFF2-40B4-BE49-F238E27FC236}">
-                <a16:creationId xmlns:a16="http://schemas.microsoft.com/office/drawing/2014/main" id="{EABBE719-D014-44D3-AE1C-4C857EDFD884}"/>
+          <p:cNvPr id="6" name="Рисунок 5">
+            <a:extLst>
+              <a:ext uri="{FF2B5EF4-FFF2-40B4-BE49-F238E27FC236}">
+                <a16:creationId xmlns:a16="http://schemas.microsoft.com/office/drawing/2014/main" id="{22C75AB9-B110-46B4-A828-39D458FED129}"/>
               </a:ext>
             </a:extLst>
           </p:cNvPr>
@@ -5952,7 +6078,7 @@
           </p:cNvPicPr>
           <p:nvPr/>
         </p:nvPicPr>
-        <p:blipFill rotWithShape="1">
+        <p:blipFill>
           <a:blip r:embed="rId3">
             <a:extLst>
               <a:ext uri="{28A0092B-C50C-407E-A947-70E740481C1C}">
@@ -5960,13 +6086,14 @@
               </a:ext>
             </a:extLst>
           </a:blip>
-          <a:srcRect t="4070"/>
-          <a:stretch/>
+          <a:stretch>
+            <a:fillRect/>
+          </a:stretch>
         </p:blipFill>
         <p:spPr>
           <a:xfrm>
-            <a:off x="2129878" y="798897"/>
-            <a:ext cx="7932241" cy="5953224"/>
+            <a:off x="1926128" y="818147"/>
+            <a:ext cx="8339744" cy="5906963"/>
           </a:xfrm>
           <a:prstGeom prst="rect">
             <a:avLst/>
@@ -5981,7 +6108,7 @@
     </p:spTree>
     <p:extLst>
       <p:ext uri="{BB962C8B-B14F-4D97-AF65-F5344CB8AC3E}">
-        <p14:creationId xmlns:p14="http://schemas.microsoft.com/office/powerpoint/2010/main" val="1735787192"/>
+        <p14:creationId xmlns:p14="http://schemas.microsoft.com/office/powerpoint/2010/main" val="1836875581"/>
       </p:ext>
     </p:extLst>
   </p:cSld>
@@ -6041,7 +6168,7 @@
                 </a:solidFill>
                 <a:latin typeface="+mn-lt"/>
               </a:rPr>
-              <a:t>Демонстрация: управление складом (кладовщик)</a:t>
+              <a:t>Демонстрация: оформление заказа (официант)</a:t>
             </a:r>
           </a:p>
         </p:txBody>
@@ -6068,13 +6195,13 @@
               </a:ext>
             </a:extLst>
           </a:blip>
-          <a:srcRect t="3718"/>
+          <a:srcRect t="4070"/>
           <a:stretch/>
         </p:blipFill>
         <p:spPr>
           <a:xfrm>
-            <a:off x="2276950" y="1001027"/>
-            <a:ext cx="7638098" cy="5731843"/>
+            <a:off x="70071" y="1278250"/>
+            <a:ext cx="6446231" cy="4837959"/>
           </a:xfrm>
           <a:prstGeom prst="rect">
             <a:avLst/>
@@ -6086,10 +6213,234 @@
           </a:ln>
         </p:spPr>
       </p:pic>
+      <p:pic>
+        <p:nvPicPr>
+          <p:cNvPr id="5" name="Рисунок 4">
+            <a:extLst>
+              <a:ext uri="{FF2B5EF4-FFF2-40B4-BE49-F238E27FC236}">
+                <a16:creationId xmlns:a16="http://schemas.microsoft.com/office/drawing/2014/main" id="{332F9653-46DC-404A-A6C3-33DDA566781A}"/>
+              </a:ext>
+            </a:extLst>
+          </p:cNvPr>
+          <p:cNvPicPr>
+            <a:picLocks noChangeAspect="1"/>
+          </p:cNvPicPr>
+          <p:nvPr/>
+        </p:nvPicPr>
+        <p:blipFill rotWithShape="1">
+          <a:blip r:embed="rId4">
+            <a:extLst>
+              <a:ext uri="{28A0092B-C50C-407E-A947-70E740481C1C}">
+                <a14:useLocalDpi xmlns:a14="http://schemas.microsoft.com/office/drawing/2010/main" val="0"/>
+              </a:ext>
+            </a:extLst>
+          </a:blip>
+          <a:srcRect t="21048" b="43368"/>
+          <a:stretch/>
+        </p:blipFill>
+        <p:spPr>
+          <a:xfrm>
+            <a:off x="6612217" y="1278250"/>
+            <a:ext cx="5509712" cy="1416824"/>
+          </a:xfrm>
+          <a:prstGeom prst="rect">
+            <a:avLst/>
+          </a:prstGeom>
+          <a:ln w="25400">
+            <a:solidFill>
+              <a:srgbClr val="0F79B3"/>
+            </a:solidFill>
+          </a:ln>
+        </p:spPr>
+      </p:pic>
+      <p:pic>
+        <p:nvPicPr>
+          <p:cNvPr id="7" name="Рисунок 6">
+            <a:extLst>
+              <a:ext uri="{FF2B5EF4-FFF2-40B4-BE49-F238E27FC236}">
+                <a16:creationId xmlns:a16="http://schemas.microsoft.com/office/drawing/2014/main" id="{0B12E733-E6BB-4F72-8234-BE5382597BFA}"/>
+              </a:ext>
+            </a:extLst>
+          </p:cNvPr>
+          <p:cNvPicPr>
+            <a:picLocks noChangeAspect="1"/>
+          </p:cNvPicPr>
+          <p:nvPr/>
+        </p:nvPicPr>
+        <p:blipFill rotWithShape="1">
+          <a:blip r:embed="rId5">
+            <a:extLst>
+              <a:ext uri="{28A0092B-C50C-407E-A947-70E740481C1C}">
+                <a14:useLocalDpi xmlns:a14="http://schemas.microsoft.com/office/drawing/2010/main" val="0"/>
+              </a:ext>
+            </a:extLst>
+          </a:blip>
+          <a:srcRect b="68206"/>
+          <a:stretch/>
+        </p:blipFill>
+        <p:spPr>
+          <a:xfrm>
+            <a:off x="7137912" y="2810070"/>
+            <a:ext cx="4458322" cy="1992938"/>
+          </a:xfrm>
+          <a:prstGeom prst="rect">
+            <a:avLst/>
+          </a:prstGeom>
+          <a:ln w="25400">
+            <a:solidFill>
+              <a:srgbClr val="0F79B3"/>
+            </a:solidFill>
+          </a:ln>
+        </p:spPr>
+      </p:pic>
+      <p:pic>
+        <p:nvPicPr>
+          <p:cNvPr id="9" name="Рисунок 8">
+            <a:extLst>
+              <a:ext uri="{FF2B5EF4-FFF2-40B4-BE49-F238E27FC236}">
+                <a16:creationId xmlns:a16="http://schemas.microsoft.com/office/drawing/2014/main" id="{42962F8B-E26F-4F17-A159-A9C74E593477}"/>
+              </a:ext>
+            </a:extLst>
+          </p:cNvPr>
+          <p:cNvPicPr>
+            <a:picLocks noChangeAspect="1"/>
+          </p:cNvPicPr>
+          <p:nvPr/>
+        </p:nvPicPr>
+        <p:blipFill rotWithShape="1">
+          <a:blip r:embed="rId6">
+            <a:extLst>
+              <a:ext uri="{28A0092B-C50C-407E-A947-70E740481C1C}">
+                <a14:useLocalDpi xmlns:a14="http://schemas.microsoft.com/office/drawing/2010/main" val="0"/>
+              </a:ext>
+            </a:extLst>
+          </a:blip>
+          <a:srcRect b="50803"/>
+          <a:stretch/>
+        </p:blipFill>
+        <p:spPr>
+          <a:xfrm>
+            <a:off x="6612217" y="4918004"/>
+            <a:ext cx="5509711" cy="1416824"/>
+          </a:xfrm>
+          <a:prstGeom prst="rect">
+            <a:avLst/>
+          </a:prstGeom>
+          <a:ln w="25400">
+            <a:solidFill>
+              <a:srgbClr val="0F79B3"/>
+            </a:solidFill>
+          </a:ln>
+        </p:spPr>
+      </p:pic>
+      <p:sp>
+        <p:nvSpPr>
+          <p:cNvPr id="10" name="Стрелка: изогнутая вверх 9">
+            <a:extLst>
+              <a:ext uri="{FF2B5EF4-FFF2-40B4-BE49-F238E27FC236}">
+                <a16:creationId xmlns:a16="http://schemas.microsoft.com/office/drawing/2014/main" id="{AD5FAE58-ED8F-4C8D-90FD-1B68C1F48DCD}"/>
+              </a:ext>
+            </a:extLst>
+          </p:cNvPr>
+          <p:cNvSpPr/>
+          <p:nvPr/>
+        </p:nvSpPr>
+        <p:spPr>
+          <a:xfrm rot="5400000">
+            <a:off x="6548729" y="2770003"/>
+            <a:ext cx="630624" cy="503648"/>
+          </a:xfrm>
+          <a:prstGeom prst="bentUpArrow">
+            <a:avLst/>
+          </a:prstGeom>
+          <a:solidFill>
+            <a:srgbClr val="0F79B3"/>
+          </a:solidFill>
+          <a:ln>
+            <a:noFill/>
+          </a:ln>
+        </p:spPr>
+        <p:style>
+          <a:lnRef idx="2">
+            <a:schemeClr val="accent1">
+              <a:shade val="50000"/>
+            </a:schemeClr>
+          </a:lnRef>
+          <a:fillRef idx="1">
+            <a:schemeClr val="accent1"/>
+          </a:fillRef>
+          <a:effectRef idx="0">
+            <a:schemeClr val="accent1"/>
+          </a:effectRef>
+          <a:fontRef idx="minor">
+            <a:schemeClr val="lt1"/>
+          </a:fontRef>
+        </p:style>
+        <p:txBody>
+          <a:bodyPr rtlCol="0" anchor="ctr"/>
+          <a:lstStyle/>
+          <a:p>
+            <a:pPr algn="ctr"/>
+            <a:endParaRPr lang="ru-RU"/>
+          </a:p>
+        </p:txBody>
+      </p:sp>
+      <p:sp>
+        <p:nvSpPr>
+          <p:cNvPr id="11" name="Стрелка: изогнутая вверх 10">
+            <a:extLst>
+              <a:ext uri="{FF2B5EF4-FFF2-40B4-BE49-F238E27FC236}">
+                <a16:creationId xmlns:a16="http://schemas.microsoft.com/office/drawing/2014/main" id="{DC7E18A1-1BFE-4AA3-9929-947204AF361A}"/>
+              </a:ext>
+            </a:extLst>
+          </p:cNvPr>
+          <p:cNvSpPr/>
+          <p:nvPr/>
+        </p:nvSpPr>
+        <p:spPr>
+          <a:xfrm rot="10800000" flipH="1">
+            <a:off x="11608069" y="4414356"/>
+            <a:ext cx="513859" cy="503648"/>
+          </a:xfrm>
+          <a:prstGeom prst="bentUpArrow">
+            <a:avLst/>
+          </a:prstGeom>
+          <a:solidFill>
+            <a:srgbClr val="0F79B3"/>
+          </a:solidFill>
+          <a:ln>
+            <a:noFill/>
+          </a:ln>
+        </p:spPr>
+        <p:style>
+          <a:lnRef idx="2">
+            <a:schemeClr val="accent1">
+              <a:shade val="50000"/>
+            </a:schemeClr>
+          </a:lnRef>
+          <a:fillRef idx="1">
+            <a:schemeClr val="accent1"/>
+          </a:fillRef>
+          <a:effectRef idx="0">
+            <a:schemeClr val="accent1"/>
+          </a:effectRef>
+          <a:fontRef idx="minor">
+            <a:schemeClr val="lt1"/>
+          </a:fontRef>
+        </p:style>
+        <p:txBody>
+          <a:bodyPr rtlCol="0" anchor="ctr"/>
+          <a:lstStyle/>
+          <a:p>
+            <a:pPr algn="ctr"/>
+            <a:endParaRPr lang="ru-RU"/>
+          </a:p>
+        </p:txBody>
+      </p:sp>
     </p:spTree>
     <p:extLst>
       <p:ext uri="{BB962C8B-B14F-4D97-AF65-F5344CB8AC3E}">
-        <p14:creationId xmlns:p14="http://schemas.microsoft.com/office/powerpoint/2010/main" val="1518844491"/>
+        <p14:creationId xmlns:p14="http://schemas.microsoft.com/office/powerpoint/2010/main" val="1735787192"/>
       </p:ext>
     </p:extLst>
   </p:cSld>
@@ -6149,7 +6500,7 @@
                 </a:solidFill>
                 <a:latin typeface="+mn-lt"/>
               </a:rPr>
-              <a:t>Демонстрация: отчёты (администратор)</a:t>
+              <a:t>Демонстрация: управление складом (кладовщик)</a:t>
             </a:r>
           </a:p>
         </p:txBody>
@@ -6168,7 +6519,7 @@
           </p:cNvPicPr>
           <p:nvPr/>
         </p:nvPicPr>
-        <p:blipFill rotWithShape="1">
+        <p:blipFill>
           <a:blip r:embed="rId3">
             <a:extLst>
               <a:ext uri="{28A0092B-C50C-407E-A947-70E740481C1C}">
@@ -6176,13 +6527,13 @@
               </a:ext>
             </a:extLst>
           </a:blip>
-          <a:srcRect l="434" t="6840"/>
+          <a:srcRect/>
           <a:stretch/>
         </p:blipFill>
         <p:spPr>
           <a:xfrm>
-            <a:off x="1576760" y="1320927"/>
-            <a:ext cx="9038480" cy="4216146"/>
+            <a:off x="2276950" y="1003599"/>
+            <a:ext cx="7638098" cy="5726699"/>
           </a:xfrm>
           <a:prstGeom prst="rect">
             <a:avLst/>
@@ -6197,7 +6548,7 @@
     </p:spTree>
     <p:extLst>
       <p:ext uri="{BB962C8B-B14F-4D97-AF65-F5344CB8AC3E}">
-        <p14:creationId xmlns:p14="http://schemas.microsoft.com/office/powerpoint/2010/main" val="679934225"/>
+        <p14:creationId xmlns:p14="http://schemas.microsoft.com/office/powerpoint/2010/main" val="1518844491"/>
       </p:ext>
     </p:extLst>
   </p:cSld>
@@ -6242,8 +6593,8 @@
         </p:nvSpPr>
         <p:spPr>
           <a:xfrm>
-            <a:off x="0" y="46129"/>
-            <a:ext cx="10515600" cy="1325563"/>
+            <a:off x="-1" y="0"/>
+            <a:ext cx="12192000" cy="798897"/>
           </a:xfrm>
         </p:spPr>
         <p:txBody>
@@ -6257,900 +6608,95 @@
                 </a:solidFill>
                 <a:latin typeface="+mn-lt"/>
               </a:rPr>
-              <a:t>Результаты тестирования</a:t>
-            </a:r>
-          </a:p>
-        </p:txBody>
-      </p:sp>
-      <p:sp>
-        <p:nvSpPr>
-          <p:cNvPr id="6" name="Объект 2">
-            <a:extLst>
-              <a:ext uri="{FF2B5EF4-FFF2-40B4-BE49-F238E27FC236}">
-                <a16:creationId xmlns:a16="http://schemas.microsoft.com/office/drawing/2014/main" id="{4BFBF596-18EF-4E96-B9F3-6B3A62537E1B}"/>
-              </a:ext>
-            </a:extLst>
-          </p:cNvPr>
-          <p:cNvSpPr txBox="1">
-            <a:spLocks/>
-          </p:cNvSpPr>
+              <a:t>Демонстрация: отчёты (администратор)</a:t>
+            </a:r>
+          </a:p>
+        </p:txBody>
+      </p:sp>
+      <p:pic>
+        <p:nvPicPr>
+          <p:cNvPr id="5" name="Рисунок 4">
+            <a:extLst>
+              <a:ext uri="{FF2B5EF4-FFF2-40B4-BE49-F238E27FC236}">
+                <a16:creationId xmlns:a16="http://schemas.microsoft.com/office/drawing/2014/main" id="{DD6FE6B2-64CB-499F-A4C6-218B5CBFFC57}"/>
+              </a:ext>
+            </a:extLst>
+          </p:cNvPr>
+          <p:cNvPicPr>
+            <a:picLocks noChangeAspect="1"/>
+          </p:cNvPicPr>
           <p:nvPr/>
-        </p:nvSpPr>
+        </p:nvPicPr>
+        <p:blipFill rotWithShape="1">
+          <a:blip r:embed="rId3">
+            <a:extLst>
+              <a:ext uri="{28A0092B-C50C-407E-A947-70E740481C1C}">
+                <a14:useLocalDpi xmlns:a14="http://schemas.microsoft.com/office/drawing/2010/main" val="0"/>
+              </a:ext>
+            </a:extLst>
+          </a:blip>
+          <a:srcRect t="7252" b="17474"/>
+          <a:stretch/>
+        </p:blipFill>
         <p:spPr>
           <a:xfrm>
-            <a:off x="0" y="1690687"/>
-            <a:ext cx="5948413" cy="5095123"/>
+            <a:off x="83419" y="917696"/>
+            <a:ext cx="6637299" cy="3731306"/>
           </a:xfrm>
           <a:prstGeom prst="rect">
             <a:avLst/>
           </a:prstGeom>
+          <a:ln w="25400">
+            <a:solidFill>
+              <a:srgbClr val="0F79B3"/>
+            </a:solidFill>
+          </a:ln>
         </p:spPr>
-        <p:txBody>
-          <a:bodyPr vert="horz" lIns="91440" tIns="45720" rIns="91440" bIns="45720" rtlCol="0">
-            <a:normAutofit/>
-          </a:bodyPr>
-          <a:lstStyle>
-            <a:lvl1pPr marL="228600" indent="-228600" algn="l" defTabSz="914400" rtl="0" eaLnBrk="1" latinLnBrk="0" hangingPunct="1">
-              <a:lnSpc>
-                <a:spcPct val="90000"/>
-              </a:lnSpc>
-              <a:spcBef>
-                <a:spcPts val="1000"/>
-              </a:spcBef>
-              <a:buFont typeface="Arial" panose="020B0604020202020204" pitchFamily="34" charset="0"/>
-              <a:buChar char="•"/>
-              <a:defRPr sz="2800" kern="1200">
-                <a:solidFill>
-                  <a:schemeClr val="tx1"/>
-                </a:solidFill>
-                <a:latin typeface="+mn-lt"/>
-                <a:ea typeface="+mn-ea"/>
-                <a:cs typeface="+mn-cs"/>
-              </a:defRPr>
-            </a:lvl1pPr>
-            <a:lvl2pPr marL="685800" indent="-228600" algn="l" defTabSz="914400" rtl="0" eaLnBrk="1" latinLnBrk="0" hangingPunct="1">
-              <a:lnSpc>
-                <a:spcPct val="90000"/>
-              </a:lnSpc>
-              <a:spcBef>
-                <a:spcPts val="500"/>
-              </a:spcBef>
-              <a:buFont typeface="Arial" panose="020B0604020202020204" pitchFamily="34" charset="0"/>
-              <a:buChar char="•"/>
-              <a:defRPr sz="2400" kern="1200">
-                <a:solidFill>
-                  <a:schemeClr val="tx1"/>
-                </a:solidFill>
-                <a:latin typeface="+mn-lt"/>
-                <a:ea typeface="+mn-ea"/>
-                <a:cs typeface="+mn-cs"/>
-              </a:defRPr>
-            </a:lvl2pPr>
-            <a:lvl3pPr marL="1143000" indent="-228600" algn="l" defTabSz="914400" rtl="0" eaLnBrk="1" latinLnBrk="0" hangingPunct="1">
-              <a:lnSpc>
-                <a:spcPct val="90000"/>
-              </a:lnSpc>
-              <a:spcBef>
-                <a:spcPts val="500"/>
-              </a:spcBef>
-              <a:buFont typeface="Arial" panose="020B0604020202020204" pitchFamily="34" charset="0"/>
-              <a:buChar char="•"/>
-              <a:defRPr sz="2000" kern="1200">
-                <a:solidFill>
-                  <a:schemeClr val="tx1"/>
-                </a:solidFill>
-                <a:latin typeface="+mn-lt"/>
-                <a:ea typeface="+mn-ea"/>
-                <a:cs typeface="+mn-cs"/>
-              </a:defRPr>
-            </a:lvl3pPr>
-            <a:lvl4pPr marL="1600200" indent="-228600" algn="l" defTabSz="914400" rtl="0" eaLnBrk="1" latinLnBrk="0" hangingPunct="1">
-              <a:lnSpc>
-                <a:spcPct val="90000"/>
-              </a:lnSpc>
-              <a:spcBef>
-                <a:spcPts val="500"/>
-              </a:spcBef>
-              <a:buFont typeface="Arial" panose="020B0604020202020204" pitchFamily="34" charset="0"/>
-              <a:buChar char="•"/>
-              <a:defRPr sz="1800" kern="1200">
-                <a:solidFill>
-                  <a:schemeClr val="tx1"/>
-                </a:solidFill>
-                <a:latin typeface="+mn-lt"/>
-                <a:ea typeface="+mn-ea"/>
-                <a:cs typeface="+mn-cs"/>
-              </a:defRPr>
-            </a:lvl4pPr>
-            <a:lvl5pPr marL="2057400" indent="-228600" algn="l" defTabSz="914400" rtl="0" eaLnBrk="1" latinLnBrk="0" hangingPunct="1">
-              <a:lnSpc>
-                <a:spcPct val="90000"/>
-              </a:lnSpc>
-              <a:spcBef>
-                <a:spcPts val="500"/>
-              </a:spcBef>
-              <a:buFont typeface="Arial" panose="020B0604020202020204" pitchFamily="34" charset="0"/>
-              <a:buChar char="•"/>
-              <a:defRPr sz="1800" kern="1200">
-                <a:solidFill>
-                  <a:schemeClr val="tx1"/>
-                </a:solidFill>
-                <a:latin typeface="+mn-lt"/>
-                <a:ea typeface="+mn-ea"/>
-                <a:cs typeface="+mn-cs"/>
-              </a:defRPr>
-            </a:lvl5pPr>
-            <a:lvl6pPr marL="2514600" indent="-228600" algn="l" defTabSz="914400" rtl="0" eaLnBrk="1" latinLnBrk="0" hangingPunct="1">
-              <a:lnSpc>
-                <a:spcPct val="90000"/>
-              </a:lnSpc>
-              <a:spcBef>
-                <a:spcPts val="500"/>
-              </a:spcBef>
-              <a:buFont typeface="Arial" panose="020B0604020202020204" pitchFamily="34" charset="0"/>
-              <a:buChar char="•"/>
-              <a:defRPr sz="1800" kern="1200">
-                <a:solidFill>
-                  <a:schemeClr val="tx1"/>
-                </a:solidFill>
-                <a:latin typeface="+mn-lt"/>
-                <a:ea typeface="+mn-ea"/>
-                <a:cs typeface="+mn-cs"/>
-              </a:defRPr>
-            </a:lvl6pPr>
-            <a:lvl7pPr marL="2971800" indent="-228600" algn="l" defTabSz="914400" rtl="0" eaLnBrk="1" latinLnBrk="0" hangingPunct="1">
-              <a:lnSpc>
-                <a:spcPct val="90000"/>
-              </a:lnSpc>
-              <a:spcBef>
-                <a:spcPts val="500"/>
-              </a:spcBef>
-              <a:buFont typeface="Arial" panose="020B0604020202020204" pitchFamily="34" charset="0"/>
-              <a:buChar char="•"/>
-              <a:defRPr sz="1800" kern="1200">
-                <a:solidFill>
-                  <a:schemeClr val="tx1"/>
-                </a:solidFill>
-                <a:latin typeface="+mn-lt"/>
-                <a:ea typeface="+mn-ea"/>
-                <a:cs typeface="+mn-cs"/>
-              </a:defRPr>
-            </a:lvl7pPr>
-            <a:lvl8pPr marL="3429000" indent="-228600" algn="l" defTabSz="914400" rtl="0" eaLnBrk="1" latinLnBrk="0" hangingPunct="1">
-              <a:lnSpc>
-                <a:spcPct val="90000"/>
-              </a:lnSpc>
-              <a:spcBef>
-                <a:spcPts val="500"/>
-              </a:spcBef>
-              <a:buFont typeface="Arial" panose="020B0604020202020204" pitchFamily="34" charset="0"/>
-              <a:buChar char="•"/>
-              <a:defRPr sz="1800" kern="1200">
-                <a:solidFill>
-                  <a:schemeClr val="tx1"/>
-                </a:solidFill>
-                <a:latin typeface="+mn-lt"/>
-                <a:ea typeface="+mn-ea"/>
-                <a:cs typeface="+mn-cs"/>
-              </a:defRPr>
-            </a:lvl8pPr>
-            <a:lvl9pPr marL="3886200" indent="-228600" algn="l" defTabSz="914400" rtl="0" eaLnBrk="1" latinLnBrk="0" hangingPunct="1">
-              <a:lnSpc>
-                <a:spcPct val="90000"/>
-              </a:lnSpc>
-              <a:spcBef>
-                <a:spcPts val="500"/>
-              </a:spcBef>
-              <a:buFont typeface="Arial" panose="020B0604020202020204" pitchFamily="34" charset="0"/>
-              <a:buChar char="•"/>
-              <a:defRPr sz="1800" kern="1200">
-                <a:solidFill>
-                  <a:schemeClr val="tx1"/>
-                </a:solidFill>
-                <a:latin typeface="+mn-lt"/>
-                <a:ea typeface="+mn-ea"/>
-                <a:cs typeface="+mn-cs"/>
-              </a:defRPr>
-            </a:lvl9pPr>
-          </a:lstStyle>
-          <a:p>
-            <a:pPr marL="0" indent="0">
-              <a:buNone/>
-            </a:pPr>
-            <a:r>
-              <a:rPr lang="ru-RU" dirty="0">
-                <a:solidFill>
-                  <a:srgbClr val="0F79B3"/>
-                </a:solidFill>
-              </a:rPr>
-              <a:t>Модульные тесты (</a:t>
-            </a:r>
-            <a:r>
-              <a:rPr lang="ru-RU" dirty="0" err="1">
-                <a:solidFill>
-                  <a:srgbClr val="0F79B3"/>
-                </a:solidFill>
-              </a:rPr>
-              <a:t>Qt</a:t>
-            </a:r>
-            <a:r>
-              <a:rPr lang="ru-RU" dirty="0">
-                <a:solidFill>
-                  <a:srgbClr val="0F79B3"/>
-                </a:solidFill>
-              </a:rPr>
-              <a:t> </a:t>
-            </a:r>
-            <a:r>
-              <a:rPr lang="ru-RU" dirty="0" err="1">
-                <a:solidFill>
-                  <a:srgbClr val="0F79B3"/>
-                </a:solidFill>
-              </a:rPr>
-              <a:t>Test</a:t>
-            </a:r>
-            <a:r>
-              <a:rPr lang="ru-RU" dirty="0">
-                <a:solidFill>
-                  <a:srgbClr val="0F79B3"/>
-                </a:solidFill>
-              </a:rPr>
-              <a:t>): </a:t>
-            </a:r>
-            <a:r>
-              <a:rPr lang="ru-RU" dirty="0" err="1">
-                <a:solidFill>
-                  <a:srgbClr val="191923"/>
-                </a:solidFill>
-              </a:rPr>
-              <a:t>Logs</a:t>
-            </a:r>
-            <a:r>
-              <a:rPr lang="ru-RU" dirty="0">
-                <a:solidFill>
-                  <a:srgbClr val="191923"/>
-                </a:solidFill>
-              </a:rPr>
-              <a:t>, </a:t>
-            </a:r>
-            <a:r>
-              <a:rPr lang="ru-RU" dirty="0" err="1">
-                <a:solidFill>
-                  <a:srgbClr val="191923"/>
-                </a:solidFill>
-              </a:rPr>
-              <a:t>Settings</a:t>
-            </a:r>
-            <a:r>
-              <a:rPr lang="ru-RU" dirty="0">
-                <a:solidFill>
-                  <a:srgbClr val="191923"/>
-                </a:solidFill>
-              </a:rPr>
-              <a:t>, </a:t>
-            </a:r>
-            <a:r>
-              <a:rPr lang="ru-RU" dirty="0" err="1">
-                <a:solidFill>
-                  <a:srgbClr val="191923"/>
-                </a:solidFill>
-              </a:rPr>
-              <a:t>TcpClient</a:t>
-            </a:r>
-            <a:r>
-              <a:rPr lang="ru-RU" dirty="0">
-                <a:solidFill>
-                  <a:srgbClr val="191923"/>
-                </a:solidFill>
-              </a:rPr>
-              <a:t> – все пройдены.</a:t>
-            </a:r>
-          </a:p>
-          <a:p>
-            <a:pPr marL="0" indent="0">
-              <a:buNone/>
-            </a:pPr>
-            <a:r>
-              <a:rPr lang="ru-RU" dirty="0">
-                <a:solidFill>
-                  <a:srgbClr val="0F79B3"/>
-                </a:solidFill>
-              </a:rPr>
-              <a:t>Функциональные тесты (13 кейсов) – </a:t>
-            </a:r>
-            <a:r>
-              <a:rPr lang="ru-RU" dirty="0">
-                <a:solidFill>
-                  <a:srgbClr val="191923"/>
-                </a:solidFill>
-              </a:rPr>
-              <a:t>все пройдены.</a:t>
-            </a:r>
-          </a:p>
-          <a:p>
-            <a:pPr marL="0" indent="0">
-              <a:buNone/>
-            </a:pPr>
-            <a:r>
-              <a:rPr lang="ru-RU" dirty="0">
-                <a:solidFill>
-                  <a:srgbClr val="0F79B3"/>
-                </a:solidFill>
-              </a:rPr>
-              <a:t>Охвачены:</a:t>
-            </a:r>
-            <a:r>
-              <a:rPr lang="ru-RU" dirty="0">
-                <a:solidFill>
-                  <a:srgbClr val="191923"/>
-                </a:solidFill>
-              </a:rPr>
-              <a:t> авторизация, добавление/удаление блюд, списание/возврат, отчёты, настройки.</a:t>
-            </a:r>
-          </a:p>
-        </p:txBody>
-      </p:sp>
-      <p:sp>
-        <p:nvSpPr>
-          <p:cNvPr id="7" name="Объект 2">
-            <a:extLst>
-              <a:ext uri="{FF2B5EF4-FFF2-40B4-BE49-F238E27FC236}">
-                <a16:creationId xmlns:a16="http://schemas.microsoft.com/office/drawing/2014/main" id="{2688FD49-EB8A-4B3D-9324-025D9F4C26C8}"/>
-              </a:ext>
-            </a:extLst>
-          </p:cNvPr>
-          <p:cNvSpPr txBox="1">
-            <a:spLocks/>
-          </p:cNvSpPr>
+      </p:pic>
+      <p:pic>
+        <p:nvPicPr>
+          <p:cNvPr id="7" name="Рисунок 6">
+            <a:extLst>
+              <a:ext uri="{FF2B5EF4-FFF2-40B4-BE49-F238E27FC236}">
+                <a16:creationId xmlns:a16="http://schemas.microsoft.com/office/drawing/2014/main" id="{56272B41-FC27-486F-AEA7-A75A1D345CAF}"/>
+              </a:ext>
+            </a:extLst>
+          </p:cNvPr>
+          <p:cNvPicPr>
+            <a:picLocks noChangeAspect="1"/>
+          </p:cNvPicPr>
           <p:nvPr/>
-        </p:nvSpPr>
+        </p:nvPicPr>
+        <p:blipFill rotWithShape="1">
+          <a:blip r:embed="rId4">
+            <a:extLst>
+              <a:ext uri="{28A0092B-C50C-407E-A947-70E740481C1C}">
+                <a14:useLocalDpi xmlns:a14="http://schemas.microsoft.com/office/drawing/2010/main" val="0"/>
+              </a:ext>
+            </a:extLst>
+          </a:blip>
+          <a:srcRect t="10855" b="12080"/>
+          <a:stretch/>
+        </p:blipFill>
         <p:spPr>
           <a:xfrm>
-            <a:off x="6096000" y="933651"/>
-            <a:ext cx="6096000" cy="5852159"/>
+            <a:off x="4259706" y="3852511"/>
+            <a:ext cx="7848875" cy="2875547"/>
           </a:xfrm>
           <a:prstGeom prst="rect">
             <a:avLst/>
           </a:prstGeom>
+          <a:ln w="25400">
+            <a:solidFill>
+              <a:srgbClr val="0F79B3"/>
+            </a:solidFill>
+          </a:ln>
         </p:spPr>
-        <p:txBody>
-          <a:bodyPr vert="horz" lIns="91440" tIns="45720" rIns="91440" bIns="45720" rtlCol="0">
-            <a:noAutofit/>
-          </a:bodyPr>
-          <a:lstStyle>
-            <a:lvl1pPr marL="228600" indent="-228600" algn="l" defTabSz="914400" rtl="0" eaLnBrk="1" latinLnBrk="0" hangingPunct="1">
-              <a:lnSpc>
-                <a:spcPct val="90000"/>
-              </a:lnSpc>
-              <a:spcBef>
-                <a:spcPts val="1000"/>
-              </a:spcBef>
-              <a:buFont typeface="Arial" panose="020B0604020202020204" pitchFamily="34" charset="0"/>
-              <a:buChar char="•"/>
-              <a:defRPr sz="2800" kern="1200">
-                <a:solidFill>
-                  <a:schemeClr val="tx1"/>
-                </a:solidFill>
-                <a:latin typeface="+mn-lt"/>
-                <a:ea typeface="+mn-ea"/>
-                <a:cs typeface="+mn-cs"/>
-              </a:defRPr>
-            </a:lvl1pPr>
-            <a:lvl2pPr marL="685800" indent="-228600" algn="l" defTabSz="914400" rtl="0" eaLnBrk="1" latinLnBrk="0" hangingPunct="1">
-              <a:lnSpc>
-                <a:spcPct val="90000"/>
-              </a:lnSpc>
-              <a:spcBef>
-                <a:spcPts val="500"/>
-              </a:spcBef>
-              <a:buFont typeface="Arial" panose="020B0604020202020204" pitchFamily="34" charset="0"/>
-              <a:buChar char="•"/>
-              <a:defRPr sz="2400" kern="1200">
-                <a:solidFill>
-                  <a:schemeClr val="tx1"/>
-                </a:solidFill>
-                <a:latin typeface="+mn-lt"/>
-                <a:ea typeface="+mn-ea"/>
-                <a:cs typeface="+mn-cs"/>
-              </a:defRPr>
-            </a:lvl2pPr>
-            <a:lvl3pPr marL="1143000" indent="-228600" algn="l" defTabSz="914400" rtl="0" eaLnBrk="1" latinLnBrk="0" hangingPunct="1">
-              <a:lnSpc>
-                <a:spcPct val="90000"/>
-              </a:lnSpc>
-              <a:spcBef>
-                <a:spcPts val="500"/>
-              </a:spcBef>
-              <a:buFont typeface="Arial" panose="020B0604020202020204" pitchFamily="34" charset="0"/>
-              <a:buChar char="•"/>
-              <a:defRPr sz="2000" kern="1200">
-                <a:solidFill>
-                  <a:schemeClr val="tx1"/>
-                </a:solidFill>
-                <a:latin typeface="+mn-lt"/>
-                <a:ea typeface="+mn-ea"/>
-                <a:cs typeface="+mn-cs"/>
-              </a:defRPr>
-            </a:lvl3pPr>
-            <a:lvl4pPr marL="1600200" indent="-228600" algn="l" defTabSz="914400" rtl="0" eaLnBrk="1" latinLnBrk="0" hangingPunct="1">
-              <a:lnSpc>
-                <a:spcPct val="90000"/>
-              </a:lnSpc>
-              <a:spcBef>
-                <a:spcPts val="500"/>
-              </a:spcBef>
-              <a:buFont typeface="Arial" panose="020B0604020202020204" pitchFamily="34" charset="0"/>
-              <a:buChar char="•"/>
-              <a:defRPr sz="1800" kern="1200">
-                <a:solidFill>
-                  <a:schemeClr val="tx1"/>
-                </a:solidFill>
-                <a:latin typeface="+mn-lt"/>
-                <a:ea typeface="+mn-ea"/>
-                <a:cs typeface="+mn-cs"/>
-              </a:defRPr>
-            </a:lvl4pPr>
-            <a:lvl5pPr marL="2057400" indent="-228600" algn="l" defTabSz="914400" rtl="0" eaLnBrk="1" latinLnBrk="0" hangingPunct="1">
-              <a:lnSpc>
-                <a:spcPct val="90000"/>
-              </a:lnSpc>
-              <a:spcBef>
-                <a:spcPts val="500"/>
-              </a:spcBef>
-              <a:buFont typeface="Arial" panose="020B0604020202020204" pitchFamily="34" charset="0"/>
-              <a:buChar char="•"/>
-              <a:defRPr sz="1800" kern="1200">
-                <a:solidFill>
-                  <a:schemeClr val="tx1"/>
-                </a:solidFill>
-                <a:latin typeface="+mn-lt"/>
-                <a:ea typeface="+mn-ea"/>
-                <a:cs typeface="+mn-cs"/>
-              </a:defRPr>
-            </a:lvl5pPr>
-            <a:lvl6pPr marL="2514600" indent="-228600" algn="l" defTabSz="914400" rtl="0" eaLnBrk="1" latinLnBrk="0" hangingPunct="1">
-              <a:lnSpc>
-                <a:spcPct val="90000"/>
-              </a:lnSpc>
-              <a:spcBef>
-                <a:spcPts val="500"/>
-              </a:spcBef>
-              <a:buFont typeface="Arial" panose="020B0604020202020204" pitchFamily="34" charset="0"/>
-              <a:buChar char="•"/>
-              <a:defRPr sz="1800" kern="1200">
-                <a:solidFill>
-                  <a:schemeClr val="tx1"/>
-                </a:solidFill>
-                <a:latin typeface="+mn-lt"/>
-                <a:ea typeface="+mn-ea"/>
-                <a:cs typeface="+mn-cs"/>
-              </a:defRPr>
-            </a:lvl6pPr>
-            <a:lvl7pPr marL="2971800" indent="-228600" algn="l" defTabSz="914400" rtl="0" eaLnBrk="1" latinLnBrk="0" hangingPunct="1">
-              <a:lnSpc>
-                <a:spcPct val="90000"/>
-              </a:lnSpc>
-              <a:spcBef>
-                <a:spcPts val="500"/>
-              </a:spcBef>
-              <a:buFont typeface="Arial" panose="020B0604020202020204" pitchFamily="34" charset="0"/>
-              <a:buChar char="•"/>
-              <a:defRPr sz="1800" kern="1200">
-                <a:solidFill>
-                  <a:schemeClr val="tx1"/>
-                </a:solidFill>
-                <a:latin typeface="+mn-lt"/>
-                <a:ea typeface="+mn-ea"/>
-                <a:cs typeface="+mn-cs"/>
-              </a:defRPr>
-            </a:lvl7pPr>
-            <a:lvl8pPr marL="3429000" indent="-228600" algn="l" defTabSz="914400" rtl="0" eaLnBrk="1" latinLnBrk="0" hangingPunct="1">
-              <a:lnSpc>
-                <a:spcPct val="90000"/>
-              </a:lnSpc>
-              <a:spcBef>
-                <a:spcPts val="500"/>
-              </a:spcBef>
-              <a:buFont typeface="Arial" panose="020B0604020202020204" pitchFamily="34" charset="0"/>
-              <a:buChar char="•"/>
-              <a:defRPr sz="1800" kern="1200">
-                <a:solidFill>
-                  <a:schemeClr val="tx1"/>
-                </a:solidFill>
-                <a:latin typeface="+mn-lt"/>
-                <a:ea typeface="+mn-ea"/>
-                <a:cs typeface="+mn-cs"/>
-              </a:defRPr>
-            </a:lvl8pPr>
-            <a:lvl9pPr marL="3886200" indent="-228600" algn="l" defTabSz="914400" rtl="0" eaLnBrk="1" latinLnBrk="0" hangingPunct="1">
-              <a:lnSpc>
-                <a:spcPct val="90000"/>
-              </a:lnSpc>
-              <a:spcBef>
-                <a:spcPts val="500"/>
-              </a:spcBef>
-              <a:buFont typeface="Arial" panose="020B0604020202020204" pitchFamily="34" charset="0"/>
-              <a:buChar char="•"/>
-              <a:defRPr sz="1800" kern="1200">
-                <a:solidFill>
-                  <a:schemeClr val="tx1"/>
-                </a:solidFill>
-                <a:latin typeface="+mn-lt"/>
-                <a:ea typeface="+mn-ea"/>
-                <a:cs typeface="+mn-cs"/>
-              </a:defRPr>
-            </a:lvl9pPr>
-          </a:lstStyle>
-          <a:p>
-            <a:pPr marL="0" indent="0">
-              <a:buNone/>
-            </a:pPr>
-            <a:r>
-              <a:rPr lang="ru-RU" sz="2400" dirty="0">
-                <a:solidFill>
-                  <a:srgbClr val="0F79B3"/>
-                </a:solidFill>
-              </a:rPr>
-              <a:t>Результаты модульных тестов:</a:t>
-            </a:r>
-          </a:p>
-          <a:p>
-            <a:pPr marL="0" indent="0">
-              <a:buNone/>
-            </a:pPr>
-            <a:r>
-              <a:rPr lang="ru-RU" sz="2400" dirty="0">
-                <a:solidFill>
-                  <a:srgbClr val="191923"/>
-                </a:solidFill>
-              </a:rPr>
-              <a:t>***</a:t>
-            </a:r>
-            <a:r>
-              <a:rPr lang="en-US" sz="2400" dirty="0">
-                <a:solidFill>
-                  <a:srgbClr val="191923"/>
-                </a:solidFill>
-              </a:rPr>
-              <a:t>Start testing of </a:t>
-            </a:r>
-            <a:r>
-              <a:rPr lang="en-US" sz="2400" dirty="0" err="1">
-                <a:solidFill>
-                  <a:srgbClr val="191923"/>
-                </a:solidFill>
-              </a:rPr>
-              <a:t>TestLogs</a:t>
-            </a:r>
-            <a:r>
-              <a:rPr lang="ru-RU" sz="2400" dirty="0">
-                <a:solidFill>
-                  <a:srgbClr val="191923"/>
-                </a:solidFill>
-              </a:rPr>
-              <a:t> ***</a:t>
-            </a:r>
-          </a:p>
-          <a:p>
-            <a:pPr marL="0" indent="0">
-              <a:buNone/>
-            </a:pPr>
-            <a:r>
-              <a:rPr lang="ru-RU" sz="2400" dirty="0">
-                <a:solidFill>
-                  <a:srgbClr val="191923"/>
-                </a:solidFill>
-              </a:rPr>
-              <a:t>…</a:t>
-            </a:r>
-            <a:endParaRPr lang="en-US" sz="2400" dirty="0">
-              <a:solidFill>
-                <a:srgbClr val="191923"/>
-              </a:solidFill>
-            </a:endParaRPr>
-          </a:p>
-          <a:p>
-            <a:pPr marL="0" indent="0">
-              <a:buNone/>
-            </a:pPr>
-            <a:r>
-              <a:rPr lang="en-US" sz="2400" dirty="0">
-                <a:solidFill>
-                  <a:srgbClr val="191923"/>
-                </a:solidFill>
-              </a:rPr>
-              <a:t>Totals: 4 passed, 0 failed, 0 skipped</a:t>
-            </a:r>
-          </a:p>
-          <a:p>
-            <a:pPr marL="0" indent="0">
-              <a:buNone/>
-            </a:pPr>
-            <a:r>
-              <a:rPr lang="ru-RU" sz="2400" dirty="0">
-                <a:solidFill>
-                  <a:srgbClr val="191923"/>
-                </a:solidFill>
-              </a:rPr>
-              <a:t>*** </a:t>
-            </a:r>
-            <a:r>
-              <a:rPr lang="en-US" sz="2400" dirty="0">
-                <a:solidFill>
-                  <a:srgbClr val="191923"/>
-                </a:solidFill>
-              </a:rPr>
-              <a:t>Finished testing of </a:t>
-            </a:r>
-            <a:r>
-              <a:rPr lang="en-US" sz="2400" dirty="0" err="1">
-                <a:solidFill>
-                  <a:srgbClr val="191923"/>
-                </a:solidFill>
-              </a:rPr>
-              <a:t>TestLogs</a:t>
-            </a:r>
-            <a:r>
-              <a:rPr lang="ru-RU" sz="2400" dirty="0">
-                <a:solidFill>
-                  <a:srgbClr val="191923"/>
-                </a:solidFill>
-              </a:rPr>
-              <a:t> ***</a:t>
-            </a:r>
-            <a:endParaRPr lang="en-US" sz="2400" dirty="0">
-              <a:solidFill>
-                <a:srgbClr val="191923"/>
-              </a:solidFill>
-            </a:endParaRPr>
-          </a:p>
-          <a:p>
-            <a:pPr marL="0" indent="0">
-              <a:buNone/>
-            </a:pPr>
-            <a:r>
-              <a:rPr lang="ru-RU" sz="2400" dirty="0">
-                <a:solidFill>
-                  <a:srgbClr val="191923"/>
-                </a:solidFill>
-              </a:rPr>
-              <a:t>*** </a:t>
-            </a:r>
-            <a:r>
-              <a:rPr lang="en-US" sz="2400" dirty="0">
-                <a:solidFill>
-                  <a:srgbClr val="191923"/>
-                </a:solidFill>
-              </a:rPr>
-              <a:t>Start testing of </a:t>
-            </a:r>
-            <a:r>
-              <a:rPr lang="en-US" sz="2400" dirty="0" err="1">
-                <a:solidFill>
-                  <a:srgbClr val="191923"/>
-                </a:solidFill>
-              </a:rPr>
-              <a:t>TestSettings</a:t>
-            </a:r>
-            <a:r>
-              <a:rPr lang="ru-RU" sz="2400" dirty="0">
-                <a:solidFill>
-                  <a:srgbClr val="191923"/>
-                </a:solidFill>
-              </a:rPr>
-              <a:t> ***</a:t>
-            </a:r>
-            <a:r>
-              <a:rPr lang="en-US" sz="2400" dirty="0">
-                <a:solidFill>
-                  <a:srgbClr val="191923"/>
-                </a:solidFill>
-              </a:rPr>
-              <a:t> </a:t>
-            </a:r>
-            <a:endParaRPr lang="ru-RU" sz="2400" dirty="0">
-              <a:solidFill>
-                <a:srgbClr val="191923"/>
-              </a:solidFill>
-            </a:endParaRPr>
-          </a:p>
-          <a:p>
-            <a:pPr marL="0" indent="0">
-              <a:buNone/>
-            </a:pPr>
-            <a:r>
-              <a:rPr lang="ru-RU" sz="2400" dirty="0">
-                <a:solidFill>
-                  <a:srgbClr val="191923"/>
-                </a:solidFill>
-              </a:rPr>
-              <a:t>…</a:t>
-            </a:r>
-            <a:endParaRPr lang="en-US" sz="2400" dirty="0">
-              <a:solidFill>
-                <a:srgbClr val="191923"/>
-              </a:solidFill>
-            </a:endParaRPr>
-          </a:p>
-          <a:p>
-            <a:pPr marL="0" indent="0">
-              <a:buNone/>
-            </a:pPr>
-            <a:r>
-              <a:rPr lang="en-US" sz="2400" dirty="0">
-                <a:solidFill>
-                  <a:srgbClr val="191923"/>
-                </a:solidFill>
-              </a:rPr>
-              <a:t>Totals: 2 passed, 0 failed, 0 skipped</a:t>
-            </a:r>
-          </a:p>
-          <a:p>
-            <a:pPr marL="0" indent="0">
-              <a:buNone/>
-            </a:pPr>
-            <a:r>
-              <a:rPr lang="ru-RU" sz="2400" dirty="0">
-                <a:solidFill>
-                  <a:srgbClr val="191923"/>
-                </a:solidFill>
-              </a:rPr>
-              <a:t>*** </a:t>
-            </a:r>
-            <a:r>
-              <a:rPr lang="en-US" sz="2400" dirty="0">
-                <a:solidFill>
-                  <a:srgbClr val="191923"/>
-                </a:solidFill>
-              </a:rPr>
-              <a:t>Finished testing of </a:t>
-            </a:r>
-            <a:r>
-              <a:rPr lang="en-US" sz="2400" dirty="0" err="1">
-                <a:solidFill>
-                  <a:srgbClr val="191923"/>
-                </a:solidFill>
-              </a:rPr>
-              <a:t>TestSettings</a:t>
-            </a:r>
-            <a:r>
-              <a:rPr lang="ru-RU" sz="2400" dirty="0">
-                <a:solidFill>
-                  <a:srgbClr val="191923"/>
-                </a:solidFill>
-              </a:rPr>
-              <a:t> ***</a:t>
-            </a:r>
-            <a:endParaRPr lang="en-US" sz="2400" dirty="0">
-              <a:solidFill>
-                <a:srgbClr val="191923"/>
-              </a:solidFill>
-            </a:endParaRPr>
-          </a:p>
-          <a:p>
-            <a:pPr marL="0" indent="0">
-              <a:buNone/>
-            </a:pPr>
-            <a:r>
-              <a:rPr lang="ru-RU" sz="2400" dirty="0">
-                <a:solidFill>
-                  <a:srgbClr val="191923"/>
-                </a:solidFill>
-              </a:rPr>
-              <a:t>*** </a:t>
-            </a:r>
-            <a:r>
-              <a:rPr lang="en-US" sz="2400" dirty="0">
-                <a:solidFill>
-                  <a:srgbClr val="191923"/>
-                </a:solidFill>
-              </a:rPr>
-              <a:t>Start testing of </a:t>
-            </a:r>
-            <a:r>
-              <a:rPr lang="en-US" sz="2400" dirty="0" err="1">
-                <a:solidFill>
-                  <a:srgbClr val="191923"/>
-                </a:solidFill>
-              </a:rPr>
-              <a:t>TestTcpClient</a:t>
-            </a:r>
-            <a:r>
-              <a:rPr lang="ru-RU" sz="2400" dirty="0">
-                <a:solidFill>
-                  <a:srgbClr val="191923"/>
-                </a:solidFill>
-              </a:rPr>
-              <a:t> ***</a:t>
-            </a:r>
-            <a:r>
-              <a:rPr lang="en-US" sz="2400" dirty="0">
-                <a:solidFill>
-                  <a:srgbClr val="191923"/>
-                </a:solidFill>
-              </a:rPr>
-              <a:t> </a:t>
-            </a:r>
-            <a:endParaRPr lang="ru-RU" sz="2400" dirty="0">
-              <a:solidFill>
-                <a:srgbClr val="191923"/>
-              </a:solidFill>
-            </a:endParaRPr>
-          </a:p>
-          <a:p>
-            <a:pPr marL="0" indent="0">
-              <a:buNone/>
-            </a:pPr>
-            <a:r>
-              <a:rPr lang="ru-RU" sz="2400" dirty="0">
-                <a:solidFill>
-                  <a:srgbClr val="191923"/>
-                </a:solidFill>
-              </a:rPr>
-              <a:t>…</a:t>
-            </a:r>
-            <a:endParaRPr lang="en-US" sz="2400" dirty="0">
-              <a:solidFill>
-                <a:srgbClr val="191923"/>
-              </a:solidFill>
-            </a:endParaRPr>
-          </a:p>
-          <a:p>
-            <a:pPr marL="0" indent="0">
-              <a:buNone/>
-            </a:pPr>
-            <a:r>
-              <a:rPr lang="en-US" sz="2400" dirty="0">
-                <a:solidFill>
-                  <a:srgbClr val="191923"/>
-                </a:solidFill>
-              </a:rPr>
-              <a:t>Totals: 2 passed, 0 failed, 0 skipped</a:t>
-            </a:r>
-          </a:p>
-          <a:p>
-            <a:pPr marL="0" indent="0">
-              <a:buNone/>
-            </a:pPr>
-            <a:r>
-              <a:rPr lang="ru-RU" sz="2400" dirty="0">
-                <a:solidFill>
-                  <a:srgbClr val="191923"/>
-                </a:solidFill>
-              </a:rPr>
-              <a:t>*** </a:t>
-            </a:r>
-            <a:r>
-              <a:rPr lang="en-US" sz="2400" dirty="0">
-                <a:solidFill>
-                  <a:srgbClr val="191923"/>
-                </a:solidFill>
-              </a:rPr>
-              <a:t>Finished testing of </a:t>
-            </a:r>
-            <a:r>
-              <a:rPr lang="en-US" sz="2400" dirty="0" err="1">
-                <a:solidFill>
-                  <a:srgbClr val="191923"/>
-                </a:solidFill>
-              </a:rPr>
-              <a:t>TestTcpClient</a:t>
-            </a:r>
-            <a:r>
-              <a:rPr lang="ru-RU" sz="2400" dirty="0">
-                <a:solidFill>
-                  <a:srgbClr val="191923"/>
-                </a:solidFill>
-              </a:rPr>
-              <a:t> ***</a:t>
-            </a:r>
-          </a:p>
-        </p:txBody>
-      </p:sp>
+      </p:pic>
     </p:spTree>
     <p:extLst>
       <p:ext uri="{BB962C8B-B14F-4D97-AF65-F5344CB8AC3E}">
-        <p14:creationId xmlns:p14="http://schemas.microsoft.com/office/powerpoint/2010/main" val="1982774585"/>
+        <p14:creationId xmlns:p14="http://schemas.microsoft.com/office/powerpoint/2010/main" val="679934225"/>
       </p:ext>
     </p:extLst>
   </p:cSld>
@@ -7193,7 +6739,12 @@
             <p:ph type="title"/>
           </p:nvPr>
         </p:nvSpPr>
-        <p:spPr/>
+        <p:spPr>
+          <a:xfrm>
+            <a:off x="-1" y="0"/>
+            <a:ext cx="12192000" cy="798897"/>
+          </a:xfrm>
+        </p:spPr>
         <p:txBody>
           <a:bodyPr/>
           <a:lstStyle/>
@@ -7205,102 +6756,151 @@
                 </a:solidFill>
                 <a:latin typeface="+mn-lt"/>
               </a:rPr>
-              <a:t>Экономическая эффективность</a:t>
-            </a:r>
-          </a:p>
-        </p:txBody>
-      </p:sp>
-      <p:sp>
-        <p:nvSpPr>
-          <p:cNvPr id="3" name="Объект 2">
-            <a:extLst>
-              <a:ext uri="{FF2B5EF4-FFF2-40B4-BE49-F238E27FC236}">
-                <a16:creationId xmlns:a16="http://schemas.microsoft.com/office/drawing/2014/main" id="{58DBAEE7-5CC4-444F-8907-70F84B695AFC}"/>
-              </a:ext>
-            </a:extLst>
-          </p:cNvPr>
-          <p:cNvSpPr>
-            <a:spLocks noGrp="1"/>
-          </p:cNvSpPr>
-          <p:nvPr>
-            <p:ph idx="1"/>
-          </p:nvPr>
-        </p:nvSpPr>
-        <p:spPr/>
-        <p:txBody>
-          <a:bodyPr>
-            <a:normAutofit/>
-          </a:bodyPr>
-          <a:lstStyle/>
-          <a:p>
-            <a:pPr marL="0" indent="0">
-              <a:buNone/>
-            </a:pPr>
-            <a:r>
-              <a:rPr lang="ru-RU" dirty="0">
-                <a:solidFill>
-                  <a:srgbClr val="0F79B3"/>
-                </a:solidFill>
-              </a:rPr>
-              <a:t>Себестоимость разработки: </a:t>
-            </a:r>
-            <a:r>
-              <a:rPr lang="ru-RU" dirty="0">
-                <a:solidFill>
-                  <a:srgbClr val="191923"/>
-                </a:solidFill>
-              </a:rPr>
-              <a:t>419 340 руб.</a:t>
-            </a:r>
-          </a:p>
-          <a:p>
-            <a:pPr marL="0" indent="0">
-              <a:buNone/>
-            </a:pPr>
-            <a:r>
-              <a:rPr lang="ru-RU" dirty="0">
-                <a:solidFill>
-                  <a:srgbClr val="0F79B3"/>
-                </a:solidFill>
-              </a:rPr>
-              <a:t>Экономический эффект в год: </a:t>
-            </a:r>
-            <a:r>
-              <a:rPr lang="ru-RU" dirty="0">
-                <a:solidFill>
-                  <a:srgbClr val="191923"/>
-                </a:solidFill>
-              </a:rPr>
-              <a:t>~74 000 руб.</a:t>
-            </a:r>
-          </a:p>
-          <a:p>
-            <a:pPr marL="0" indent="0">
-              <a:buNone/>
-            </a:pPr>
-            <a:r>
-              <a:rPr lang="ru-RU" dirty="0">
-                <a:solidFill>
-                  <a:srgbClr val="0F79B3"/>
-                </a:solidFill>
-              </a:rPr>
-              <a:t>Срок окупаемости: </a:t>
-            </a:r>
-            <a:r>
-              <a:rPr lang="ru-RU" dirty="0">
-                <a:solidFill>
-                  <a:srgbClr val="191923"/>
-                </a:solidFill>
-              </a:rPr>
-              <a:t>1,8 года.</a:t>
-            </a:r>
+              <a:t>Демонстрация: активные заказы</a:t>
+            </a:r>
+          </a:p>
+        </p:txBody>
+      </p:sp>
+      <p:pic>
+        <p:nvPicPr>
+          <p:cNvPr id="4" name="Рисунок 3">
+            <a:extLst>
+              <a:ext uri="{FF2B5EF4-FFF2-40B4-BE49-F238E27FC236}">
+                <a16:creationId xmlns:a16="http://schemas.microsoft.com/office/drawing/2014/main" id="{16B87675-B5C6-4DCE-B353-8648185ADCFE}"/>
+              </a:ext>
+            </a:extLst>
+          </p:cNvPr>
+          <p:cNvPicPr>
+            <a:picLocks noChangeAspect="1"/>
+          </p:cNvPicPr>
+          <p:nvPr/>
+        </p:nvPicPr>
+        <p:blipFill rotWithShape="1">
+          <a:blip r:embed="rId3">
+            <a:extLst>
+              <a:ext uri="{28A0092B-C50C-407E-A947-70E740481C1C}">
+                <a14:useLocalDpi xmlns:a14="http://schemas.microsoft.com/office/drawing/2010/main" val="0"/>
+              </a:ext>
+            </a:extLst>
+          </a:blip>
+          <a:srcRect t="1165"/>
+          <a:stretch/>
+        </p:blipFill>
+        <p:spPr>
+          <a:xfrm>
+            <a:off x="86627" y="798897"/>
+            <a:ext cx="8065096" cy="4729688"/>
+          </a:xfrm>
+          <a:prstGeom prst="rect">
+            <a:avLst/>
+          </a:prstGeom>
+          <a:ln w="25400">
+            <a:solidFill>
+              <a:srgbClr val="0F79B3"/>
+            </a:solidFill>
+          </a:ln>
+        </p:spPr>
+      </p:pic>
+      <p:pic>
+        <p:nvPicPr>
+          <p:cNvPr id="8" name="Рисунок 7">
+            <a:extLst>
+              <a:ext uri="{FF2B5EF4-FFF2-40B4-BE49-F238E27FC236}">
+                <a16:creationId xmlns:a16="http://schemas.microsoft.com/office/drawing/2014/main" id="{837B98A6-EA69-4931-AFB0-A251E2F71E41}"/>
+              </a:ext>
+            </a:extLst>
+          </p:cNvPr>
+          <p:cNvPicPr>
+            <a:picLocks noChangeAspect="1"/>
+          </p:cNvPicPr>
+          <p:nvPr/>
+        </p:nvPicPr>
+        <p:blipFill rotWithShape="1">
+          <a:blip r:embed="rId4">
+            <a:extLst>
+              <a:ext uri="{28A0092B-C50C-407E-A947-70E740481C1C}">
+                <a14:useLocalDpi xmlns:a14="http://schemas.microsoft.com/office/drawing/2010/main" val="0"/>
+              </a:ext>
+            </a:extLst>
+          </a:blip>
+          <a:srcRect l="14005" t="12664" r="9804" b="9308"/>
+          <a:stretch/>
+        </p:blipFill>
+        <p:spPr>
+          <a:xfrm>
+            <a:off x="8261683" y="3617085"/>
+            <a:ext cx="3843690" cy="3096536"/>
+          </a:xfrm>
+          <a:prstGeom prst="rect">
+            <a:avLst/>
+          </a:prstGeom>
+          <a:ln w="25400">
+            <a:solidFill>
+              <a:schemeClr val="accent1"/>
+            </a:solidFill>
+          </a:ln>
+        </p:spPr>
+      </p:pic>
+      <p:sp>
+        <p:nvSpPr>
+          <p:cNvPr id="5" name="Стрелка: изогнутая вверх 4">
+            <a:extLst>
+              <a:ext uri="{FF2B5EF4-FFF2-40B4-BE49-F238E27FC236}">
+                <a16:creationId xmlns:a16="http://schemas.microsoft.com/office/drawing/2014/main" id="{150CA7FF-F83C-4EC5-A40C-06D13AC9EADB}"/>
+              </a:ext>
+            </a:extLst>
+          </p:cNvPr>
+          <p:cNvSpPr/>
+          <p:nvPr/>
+        </p:nvSpPr>
+        <p:spPr>
+          <a:xfrm rot="10800000" flipH="1">
+            <a:off x="8011195" y="2537752"/>
+            <a:ext cx="1075053" cy="1079331"/>
+          </a:xfrm>
+          <a:prstGeom prst="bentUpArrow">
+            <a:avLst>
+              <a:gd name="adj1" fmla="val 9779"/>
+              <a:gd name="adj2" fmla="val 16047"/>
+              <a:gd name="adj3" fmla="val 24105"/>
+            </a:avLst>
+          </a:prstGeom>
+          <a:solidFill>
+            <a:srgbClr val="0F79B3"/>
+          </a:solidFill>
+          <a:ln>
+            <a:noFill/>
+          </a:ln>
+        </p:spPr>
+        <p:style>
+          <a:lnRef idx="2">
+            <a:schemeClr val="accent1">
+              <a:shade val="50000"/>
+            </a:schemeClr>
+          </a:lnRef>
+          <a:fillRef idx="1">
+            <a:schemeClr val="accent1"/>
+          </a:fillRef>
+          <a:effectRef idx="0">
+            <a:schemeClr val="accent1"/>
+          </a:effectRef>
+          <a:fontRef idx="minor">
+            <a:schemeClr val="lt1"/>
+          </a:fontRef>
+        </p:style>
+        <p:txBody>
+          <a:bodyPr rtlCol="0" anchor="ctr"/>
+          <a:lstStyle/>
+          <a:p>
+            <a:pPr algn="ctr"/>
+            <a:endParaRPr lang="ru-RU"/>
           </a:p>
         </p:txBody>
       </p:sp>
     </p:spTree>
     <p:extLst>
       <p:ext uri="{BB962C8B-B14F-4D97-AF65-F5344CB8AC3E}">
-        <p14:creationId xmlns:p14="http://schemas.microsoft.com/office/powerpoint/2010/main" val="1608868222"/>
+        <p14:creationId xmlns:p14="http://schemas.microsoft.com/office/powerpoint/2010/main" val="159005517"/>
       </p:ext>
     </p:extLst>
   </p:cSld>
@@ -7343,6 +6943,959 @@
             <p:ph type="title"/>
           </p:nvPr>
         </p:nvSpPr>
+        <p:spPr>
+          <a:xfrm>
+            <a:off x="838200" y="270869"/>
+            <a:ext cx="10515600" cy="1325563"/>
+          </a:xfrm>
+        </p:spPr>
+        <p:txBody>
+          <a:bodyPr/>
+          <a:lstStyle/>
+          <a:p>
+            <a:r>
+              <a:rPr lang="ru-RU" dirty="0">
+                <a:solidFill>
+                  <a:srgbClr val="191923"/>
+                </a:solidFill>
+                <a:latin typeface="+mn-lt"/>
+              </a:rPr>
+              <a:t>Результаты тестирования</a:t>
+            </a:r>
+          </a:p>
+        </p:txBody>
+      </p:sp>
+      <p:sp>
+        <p:nvSpPr>
+          <p:cNvPr id="6" name="Объект 2">
+            <a:extLst>
+              <a:ext uri="{FF2B5EF4-FFF2-40B4-BE49-F238E27FC236}">
+                <a16:creationId xmlns:a16="http://schemas.microsoft.com/office/drawing/2014/main" id="{4BFBF596-18EF-4E96-B9F3-6B3A62537E1B}"/>
+              </a:ext>
+            </a:extLst>
+          </p:cNvPr>
+          <p:cNvSpPr txBox="1">
+            <a:spLocks/>
+          </p:cNvSpPr>
+          <p:nvPr/>
+        </p:nvSpPr>
+        <p:spPr>
+          <a:xfrm>
+            <a:off x="0" y="1690687"/>
+            <a:ext cx="5948413" cy="5095123"/>
+          </a:xfrm>
+          <a:prstGeom prst="rect">
+            <a:avLst/>
+          </a:prstGeom>
+        </p:spPr>
+        <p:txBody>
+          <a:bodyPr vert="horz" lIns="91440" tIns="45720" rIns="91440" bIns="45720" rtlCol="0">
+            <a:normAutofit/>
+          </a:bodyPr>
+          <a:lstStyle>
+            <a:lvl1pPr marL="228600" indent="-228600" algn="l" defTabSz="914400" rtl="0" eaLnBrk="1" latinLnBrk="0" hangingPunct="1">
+              <a:lnSpc>
+                <a:spcPct val="90000"/>
+              </a:lnSpc>
+              <a:spcBef>
+                <a:spcPts val="1000"/>
+              </a:spcBef>
+              <a:buFont typeface="Arial" panose="020B0604020202020204" pitchFamily="34" charset="0"/>
+              <a:buChar char="•"/>
+              <a:defRPr sz="2800" kern="1200">
+                <a:solidFill>
+                  <a:schemeClr val="tx1"/>
+                </a:solidFill>
+                <a:latin typeface="+mn-lt"/>
+                <a:ea typeface="+mn-ea"/>
+                <a:cs typeface="+mn-cs"/>
+              </a:defRPr>
+            </a:lvl1pPr>
+            <a:lvl2pPr marL="685800" indent="-228600" algn="l" defTabSz="914400" rtl="0" eaLnBrk="1" latinLnBrk="0" hangingPunct="1">
+              <a:lnSpc>
+                <a:spcPct val="90000"/>
+              </a:lnSpc>
+              <a:spcBef>
+                <a:spcPts val="500"/>
+              </a:spcBef>
+              <a:buFont typeface="Arial" panose="020B0604020202020204" pitchFamily="34" charset="0"/>
+              <a:buChar char="•"/>
+              <a:defRPr sz="2400" kern="1200">
+                <a:solidFill>
+                  <a:schemeClr val="tx1"/>
+                </a:solidFill>
+                <a:latin typeface="+mn-lt"/>
+                <a:ea typeface="+mn-ea"/>
+                <a:cs typeface="+mn-cs"/>
+              </a:defRPr>
+            </a:lvl2pPr>
+            <a:lvl3pPr marL="1143000" indent="-228600" algn="l" defTabSz="914400" rtl="0" eaLnBrk="1" latinLnBrk="0" hangingPunct="1">
+              <a:lnSpc>
+                <a:spcPct val="90000"/>
+              </a:lnSpc>
+              <a:spcBef>
+                <a:spcPts val="500"/>
+              </a:spcBef>
+              <a:buFont typeface="Arial" panose="020B0604020202020204" pitchFamily="34" charset="0"/>
+              <a:buChar char="•"/>
+              <a:defRPr sz="2000" kern="1200">
+                <a:solidFill>
+                  <a:schemeClr val="tx1"/>
+                </a:solidFill>
+                <a:latin typeface="+mn-lt"/>
+                <a:ea typeface="+mn-ea"/>
+                <a:cs typeface="+mn-cs"/>
+              </a:defRPr>
+            </a:lvl3pPr>
+            <a:lvl4pPr marL="1600200" indent="-228600" algn="l" defTabSz="914400" rtl="0" eaLnBrk="1" latinLnBrk="0" hangingPunct="1">
+              <a:lnSpc>
+                <a:spcPct val="90000"/>
+              </a:lnSpc>
+              <a:spcBef>
+                <a:spcPts val="500"/>
+              </a:spcBef>
+              <a:buFont typeface="Arial" panose="020B0604020202020204" pitchFamily="34" charset="0"/>
+              <a:buChar char="•"/>
+              <a:defRPr sz="1800" kern="1200">
+                <a:solidFill>
+                  <a:schemeClr val="tx1"/>
+                </a:solidFill>
+                <a:latin typeface="+mn-lt"/>
+                <a:ea typeface="+mn-ea"/>
+                <a:cs typeface="+mn-cs"/>
+              </a:defRPr>
+            </a:lvl4pPr>
+            <a:lvl5pPr marL="2057400" indent="-228600" algn="l" defTabSz="914400" rtl="0" eaLnBrk="1" latinLnBrk="0" hangingPunct="1">
+              <a:lnSpc>
+                <a:spcPct val="90000"/>
+              </a:lnSpc>
+              <a:spcBef>
+                <a:spcPts val="500"/>
+              </a:spcBef>
+              <a:buFont typeface="Arial" panose="020B0604020202020204" pitchFamily="34" charset="0"/>
+              <a:buChar char="•"/>
+              <a:defRPr sz="1800" kern="1200">
+                <a:solidFill>
+                  <a:schemeClr val="tx1"/>
+                </a:solidFill>
+                <a:latin typeface="+mn-lt"/>
+                <a:ea typeface="+mn-ea"/>
+                <a:cs typeface="+mn-cs"/>
+              </a:defRPr>
+            </a:lvl5pPr>
+            <a:lvl6pPr marL="2514600" indent="-228600" algn="l" defTabSz="914400" rtl="0" eaLnBrk="1" latinLnBrk="0" hangingPunct="1">
+              <a:lnSpc>
+                <a:spcPct val="90000"/>
+              </a:lnSpc>
+              <a:spcBef>
+                <a:spcPts val="500"/>
+              </a:spcBef>
+              <a:buFont typeface="Arial" panose="020B0604020202020204" pitchFamily="34" charset="0"/>
+              <a:buChar char="•"/>
+              <a:defRPr sz="1800" kern="1200">
+                <a:solidFill>
+                  <a:schemeClr val="tx1"/>
+                </a:solidFill>
+                <a:latin typeface="+mn-lt"/>
+                <a:ea typeface="+mn-ea"/>
+                <a:cs typeface="+mn-cs"/>
+              </a:defRPr>
+            </a:lvl6pPr>
+            <a:lvl7pPr marL="2971800" indent="-228600" algn="l" defTabSz="914400" rtl="0" eaLnBrk="1" latinLnBrk="0" hangingPunct="1">
+              <a:lnSpc>
+                <a:spcPct val="90000"/>
+              </a:lnSpc>
+              <a:spcBef>
+                <a:spcPts val="500"/>
+              </a:spcBef>
+              <a:buFont typeface="Arial" panose="020B0604020202020204" pitchFamily="34" charset="0"/>
+              <a:buChar char="•"/>
+              <a:defRPr sz="1800" kern="1200">
+                <a:solidFill>
+                  <a:schemeClr val="tx1"/>
+                </a:solidFill>
+                <a:latin typeface="+mn-lt"/>
+                <a:ea typeface="+mn-ea"/>
+                <a:cs typeface="+mn-cs"/>
+              </a:defRPr>
+            </a:lvl7pPr>
+            <a:lvl8pPr marL="3429000" indent="-228600" algn="l" defTabSz="914400" rtl="0" eaLnBrk="1" latinLnBrk="0" hangingPunct="1">
+              <a:lnSpc>
+                <a:spcPct val="90000"/>
+              </a:lnSpc>
+              <a:spcBef>
+                <a:spcPts val="500"/>
+              </a:spcBef>
+              <a:buFont typeface="Arial" panose="020B0604020202020204" pitchFamily="34" charset="0"/>
+              <a:buChar char="•"/>
+              <a:defRPr sz="1800" kern="1200">
+                <a:solidFill>
+                  <a:schemeClr val="tx1"/>
+                </a:solidFill>
+                <a:latin typeface="+mn-lt"/>
+                <a:ea typeface="+mn-ea"/>
+                <a:cs typeface="+mn-cs"/>
+              </a:defRPr>
+            </a:lvl8pPr>
+            <a:lvl9pPr marL="3886200" indent="-228600" algn="l" defTabSz="914400" rtl="0" eaLnBrk="1" latinLnBrk="0" hangingPunct="1">
+              <a:lnSpc>
+                <a:spcPct val="90000"/>
+              </a:lnSpc>
+              <a:spcBef>
+                <a:spcPts val="500"/>
+              </a:spcBef>
+              <a:buFont typeface="Arial" panose="020B0604020202020204" pitchFamily="34" charset="0"/>
+              <a:buChar char="•"/>
+              <a:defRPr sz="1800" kern="1200">
+                <a:solidFill>
+                  <a:schemeClr val="tx1"/>
+                </a:solidFill>
+                <a:latin typeface="+mn-lt"/>
+                <a:ea typeface="+mn-ea"/>
+                <a:cs typeface="+mn-cs"/>
+              </a:defRPr>
+            </a:lvl9pPr>
+          </a:lstStyle>
+          <a:p>
+            <a:pPr marL="0" indent="0">
+              <a:buNone/>
+            </a:pPr>
+            <a:r>
+              <a:rPr lang="ru-RU" dirty="0">
+                <a:solidFill>
+                  <a:srgbClr val="0F79B3"/>
+                </a:solidFill>
+              </a:rPr>
+              <a:t>Модульные тесты (</a:t>
+            </a:r>
+            <a:r>
+              <a:rPr lang="ru-RU" dirty="0" err="1">
+                <a:solidFill>
+                  <a:srgbClr val="0F79B3"/>
+                </a:solidFill>
+              </a:rPr>
+              <a:t>Qt</a:t>
+            </a:r>
+            <a:r>
+              <a:rPr lang="ru-RU" dirty="0">
+                <a:solidFill>
+                  <a:srgbClr val="0F79B3"/>
+                </a:solidFill>
+              </a:rPr>
+              <a:t> </a:t>
+            </a:r>
+            <a:r>
+              <a:rPr lang="ru-RU" dirty="0" err="1">
+                <a:solidFill>
+                  <a:srgbClr val="0F79B3"/>
+                </a:solidFill>
+              </a:rPr>
+              <a:t>Test</a:t>
+            </a:r>
+            <a:r>
+              <a:rPr lang="ru-RU" dirty="0">
+                <a:solidFill>
+                  <a:srgbClr val="0F79B3"/>
+                </a:solidFill>
+              </a:rPr>
+              <a:t>): </a:t>
+            </a:r>
+            <a:r>
+              <a:rPr lang="ru-RU" dirty="0" err="1">
+                <a:solidFill>
+                  <a:srgbClr val="191923"/>
+                </a:solidFill>
+              </a:rPr>
+              <a:t>Logs</a:t>
+            </a:r>
+            <a:r>
+              <a:rPr lang="ru-RU" dirty="0">
+                <a:solidFill>
+                  <a:srgbClr val="191923"/>
+                </a:solidFill>
+              </a:rPr>
+              <a:t>, </a:t>
+            </a:r>
+            <a:r>
+              <a:rPr lang="ru-RU" dirty="0" err="1">
+                <a:solidFill>
+                  <a:srgbClr val="191923"/>
+                </a:solidFill>
+              </a:rPr>
+              <a:t>Settings</a:t>
+            </a:r>
+            <a:r>
+              <a:rPr lang="ru-RU" dirty="0">
+                <a:solidFill>
+                  <a:srgbClr val="191923"/>
+                </a:solidFill>
+              </a:rPr>
+              <a:t>, </a:t>
+            </a:r>
+            <a:r>
+              <a:rPr lang="ru-RU" dirty="0" err="1">
+                <a:solidFill>
+                  <a:srgbClr val="191923"/>
+                </a:solidFill>
+              </a:rPr>
+              <a:t>TcpClient</a:t>
+            </a:r>
+            <a:r>
+              <a:rPr lang="ru-RU" dirty="0">
+                <a:solidFill>
+                  <a:srgbClr val="191923"/>
+                </a:solidFill>
+              </a:rPr>
+              <a:t> – все пройдены.</a:t>
+            </a:r>
+          </a:p>
+          <a:p>
+            <a:pPr marL="0" indent="0">
+              <a:buNone/>
+            </a:pPr>
+            <a:r>
+              <a:rPr lang="ru-RU" dirty="0">
+                <a:solidFill>
+                  <a:srgbClr val="0F79B3"/>
+                </a:solidFill>
+              </a:rPr>
+              <a:t>Функциональные тесты (13 кейсов) – </a:t>
+            </a:r>
+            <a:r>
+              <a:rPr lang="ru-RU" dirty="0">
+                <a:solidFill>
+                  <a:srgbClr val="191923"/>
+                </a:solidFill>
+              </a:rPr>
+              <a:t>все пройдены.</a:t>
+            </a:r>
+          </a:p>
+          <a:p>
+            <a:pPr marL="0" indent="0">
+              <a:buNone/>
+            </a:pPr>
+            <a:r>
+              <a:rPr lang="ru-RU" dirty="0">
+                <a:solidFill>
+                  <a:srgbClr val="0F79B3"/>
+                </a:solidFill>
+              </a:rPr>
+              <a:t>Охвачены:</a:t>
+            </a:r>
+            <a:r>
+              <a:rPr lang="ru-RU" dirty="0">
+                <a:solidFill>
+                  <a:srgbClr val="191923"/>
+                </a:solidFill>
+              </a:rPr>
+              <a:t> авторизация, добавление/удаление блюд, списание/возврат, отчёты, настройки.</a:t>
+            </a:r>
+          </a:p>
+        </p:txBody>
+      </p:sp>
+      <p:sp>
+        <p:nvSpPr>
+          <p:cNvPr id="7" name="Объект 2">
+            <a:extLst>
+              <a:ext uri="{FF2B5EF4-FFF2-40B4-BE49-F238E27FC236}">
+                <a16:creationId xmlns:a16="http://schemas.microsoft.com/office/drawing/2014/main" id="{2688FD49-EB8A-4B3D-9324-025D9F4C26C8}"/>
+              </a:ext>
+            </a:extLst>
+          </p:cNvPr>
+          <p:cNvSpPr txBox="1">
+            <a:spLocks/>
+          </p:cNvSpPr>
+          <p:nvPr/>
+        </p:nvSpPr>
+        <p:spPr>
+          <a:xfrm>
+            <a:off x="6096000" y="933651"/>
+            <a:ext cx="6096000" cy="5852159"/>
+          </a:xfrm>
+          <a:prstGeom prst="rect">
+            <a:avLst/>
+          </a:prstGeom>
+        </p:spPr>
+        <p:txBody>
+          <a:bodyPr vert="horz" lIns="91440" tIns="45720" rIns="91440" bIns="45720" rtlCol="0">
+            <a:noAutofit/>
+          </a:bodyPr>
+          <a:lstStyle>
+            <a:lvl1pPr marL="228600" indent="-228600" algn="l" defTabSz="914400" rtl="0" eaLnBrk="1" latinLnBrk="0" hangingPunct="1">
+              <a:lnSpc>
+                <a:spcPct val="90000"/>
+              </a:lnSpc>
+              <a:spcBef>
+                <a:spcPts val="1000"/>
+              </a:spcBef>
+              <a:buFont typeface="Arial" panose="020B0604020202020204" pitchFamily="34" charset="0"/>
+              <a:buChar char="•"/>
+              <a:defRPr sz="2800" kern="1200">
+                <a:solidFill>
+                  <a:schemeClr val="tx1"/>
+                </a:solidFill>
+                <a:latin typeface="+mn-lt"/>
+                <a:ea typeface="+mn-ea"/>
+                <a:cs typeface="+mn-cs"/>
+              </a:defRPr>
+            </a:lvl1pPr>
+            <a:lvl2pPr marL="685800" indent="-228600" algn="l" defTabSz="914400" rtl="0" eaLnBrk="1" latinLnBrk="0" hangingPunct="1">
+              <a:lnSpc>
+                <a:spcPct val="90000"/>
+              </a:lnSpc>
+              <a:spcBef>
+                <a:spcPts val="500"/>
+              </a:spcBef>
+              <a:buFont typeface="Arial" panose="020B0604020202020204" pitchFamily="34" charset="0"/>
+              <a:buChar char="•"/>
+              <a:defRPr sz="2400" kern="1200">
+                <a:solidFill>
+                  <a:schemeClr val="tx1"/>
+                </a:solidFill>
+                <a:latin typeface="+mn-lt"/>
+                <a:ea typeface="+mn-ea"/>
+                <a:cs typeface="+mn-cs"/>
+              </a:defRPr>
+            </a:lvl2pPr>
+            <a:lvl3pPr marL="1143000" indent="-228600" algn="l" defTabSz="914400" rtl="0" eaLnBrk="1" latinLnBrk="0" hangingPunct="1">
+              <a:lnSpc>
+                <a:spcPct val="90000"/>
+              </a:lnSpc>
+              <a:spcBef>
+                <a:spcPts val="500"/>
+              </a:spcBef>
+              <a:buFont typeface="Arial" panose="020B0604020202020204" pitchFamily="34" charset="0"/>
+              <a:buChar char="•"/>
+              <a:defRPr sz="2000" kern="1200">
+                <a:solidFill>
+                  <a:schemeClr val="tx1"/>
+                </a:solidFill>
+                <a:latin typeface="+mn-lt"/>
+                <a:ea typeface="+mn-ea"/>
+                <a:cs typeface="+mn-cs"/>
+              </a:defRPr>
+            </a:lvl3pPr>
+            <a:lvl4pPr marL="1600200" indent="-228600" algn="l" defTabSz="914400" rtl="0" eaLnBrk="1" latinLnBrk="0" hangingPunct="1">
+              <a:lnSpc>
+                <a:spcPct val="90000"/>
+              </a:lnSpc>
+              <a:spcBef>
+                <a:spcPts val="500"/>
+              </a:spcBef>
+              <a:buFont typeface="Arial" panose="020B0604020202020204" pitchFamily="34" charset="0"/>
+              <a:buChar char="•"/>
+              <a:defRPr sz="1800" kern="1200">
+                <a:solidFill>
+                  <a:schemeClr val="tx1"/>
+                </a:solidFill>
+                <a:latin typeface="+mn-lt"/>
+                <a:ea typeface="+mn-ea"/>
+                <a:cs typeface="+mn-cs"/>
+              </a:defRPr>
+            </a:lvl4pPr>
+            <a:lvl5pPr marL="2057400" indent="-228600" algn="l" defTabSz="914400" rtl="0" eaLnBrk="1" latinLnBrk="0" hangingPunct="1">
+              <a:lnSpc>
+                <a:spcPct val="90000"/>
+              </a:lnSpc>
+              <a:spcBef>
+                <a:spcPts val="500"/>
+              </a:spcBef>
+              <a:buFont typeface="Arial" panose="020B0604020202020204" pitchFamily="34" charset="0"/>
+              <a:buChar char="•"/>
+              <a:defRPr sz="1800" kern="1200">
+                <a:solidFill>
+                  <a:schemeClr val="tx1"/>
+                </a:solidFill>
+                <a:latin typeface="+mn-lt"/>
+                <a:ea typeface="+mn-ea"/>
+                <a:cs typeface="+mn-cs"/>
+              </a:defRPr>
+            </a:lvl5pPr>
+            <a:lvl6pPr marL="2514600" indent="-228600" algn="l" defTabSz="914400" rtl="0" eaLnBrk="1" latinLnBrk="0" hangingPunct="1">
+              <a:lnSpc>
+                <a:spcPct val="90000"/>
+              </a:lnSpc>
+              <a:spcBef>
+                <a:spcPts val="500"/>
+              </a:spcBef>
+              <a:buFont typeface="Arial" panose="020B0604020202020204" pitchFamily="34" charset="0"/>
+              <a:buChar char="•"/>
+              <a:defRPr sz="1800" kern="1200">
+                <a:solidFill>
+                  <a:schemeClr val="tx1"/>
+                </a:solidFill>
+                <a:latin typeface="+mn-lt"/>
+                <a:ea typeface="+mn-ea"/>
+                <a:cs typeface="+mn-cs"/>
+              </a:defRPr>
+            </a:lvl6pPr>
+            <a:lvl7pPr marL="2971800" indent="-228600" algn="l" defTabSz="914400" rtl="0" eaLnBrk="1" latinLnBrk="0" hangingPunct="1">
+              <a:lnSpc>
+                <a:spcPct val="90000"/>
+              </a:lnSpc>
+              <a:spcBef>
+                <a:spcPts val="500"/>
+              </a:spcBef>
+              <a:buFont typeface="Arial" panose="020B0604020202020204" pitchFamily="34" charset="0"/>
+              <a:buChar char="•"/>
+              <a:defRPr sz="1800" kern="1200">
+                <a:solidFill>
+                  <a:schemeClr val="tx1"/>
+                </a:solidFill>
+                <a:latin typeface="+mn-lt"/>
+                <a:ea typeface="+mn-ea"/>
+                <a:cs typeface="+mn-cs"/>
+              </a:defRPr>
+            </a:lvl7pPr>
+            <a:lvl8pPr marL="3429000" indent="-228600" algn="l" defTabSz="914400" rtl="0" eaLnBrk="1" latinLnBrk="0" hangingPunct="1">
+              <a:lnSpc>
+                <a:spcPct val="90000"/>
+              </a:lnSpc>
+              <a:spcBef>
+                <a:spcPts val="500"/>
+              </a:spcBef>
+              <a:buFont typeface="Arial" panose="020B0604020202020204" pitchFamily="34" charset="0"/>
+              <a:buChar char="•"/>
+              <a:defRPr sz="1800" kern="1200">
+                <a:solidFill>
+                  <a:schemeClr val="tx1"/>
+                </a:solidFill>
+                <a:latin typeface="+mn-lt"/>
+                <a:ea typeface="+mn-ea"/>
+                <a:cs typeface="+mn-cs"/>
+              </a:defRPr>
+            </a:lvl8pPr>
+            <a:lvl9pPr marL="3886200" indent="-228600" algn="l" defTabSz="914400" rtl="0" eaLnBrk="1" latinLnBrk="0" hangingPunct="1">
+              <a:lnSpc>
+                <a:spcPct val="90000"/>
+              </a:lnSpc>
+              <a:spcBef>
+                <a:spcPts val="500"/>
+              </a:spcBef>
+              <a:buFont typeface="Arial" panose="020B0604020202020204" pitchFamily="34" charset="0"/>
+              <a:buChar char="•"/>
+              <a:defRPr sz="1800" kern="1200">
+                <a:solidFill>
+                  <a:schemeClr val="tx1"/>
+                </a:solidFill>
+                <a:latin typeface="+mn-lt"/>
+                <a:ea typeface="+mn-ea"/>
+                <a:cs typeface="+mn-cs"/>
+              </a:defRPr>
+            </a:lvl9pPr>
+          </a:lstStyle>
+          <a:p>
+            <a:pPr marL="0" indent="0">
+              <a:buNone/>
+            </a:pPr>
+            <a:r>
+              <a:rPr lang="ru-RU" sz="2400" dirty="0">
+                <a:solidFill>
+                  <a:srgbClr val="0F79B3"/>
+                </a:solidFill>
+              </a:rPr>
+              <a:t>Результаты модульных тестов:</a:t>
+            </a:r>
+          </a:p>
+          <a:p>
+            <a:pPr marL="0" indent="0">
+              <a:buNone/>
+            </a:pPr>
+            <a:r>
+              <a:rPr lang="ru-RU" sz="2400" dirty="0">
+                <a:solidFill>
+                  <a:srgbClr val="191923"/>
+                </a:solidFill>
+              </a:rPr>
+              <a:t>***</a:t>
+            </a:r>
+            <a:r>
+              <a:rPr lang="en-US" sz="2400" dirty="0">
+                <a:solidFill>
+                  <a:srgbClr val="191923"/>
+                </a:solidFill>
+              </a:rPr>
+              <a:t>Start testing of </a:t>
+            </a:r>
+            <a:r>
+              <a:rPr lang="en-US" sz="2400" dirty="0" err="1">
+                <a:solidFill>
+                  <a:srgbClr val="191923"/>
+                </a:solidFill>
+              </a:rPr>
+              <a:t>TestLogs</a:t>
+            </a:r>
+            <a:r>
+              <a:rPr lang="ru-RU" sz="2400" dirty="0">
+                <a:solidFill>
+                  <a:srgbClr val="191923"/>
+                </a:solidFill>
+              </a:rPr>
+              <a:t> ***</a:t>
+            </a:r>
+          </a:p>
+          <a:p>
+            <a:pPr marL="0" indent="0">
+              <a:buNone/>
+            </a:pPr>
+            <a:r>
+              <a:rPr lang="ru-RU" sz="2400" dirty="0">
+                <a:solidFill>
+                  <a:srgbClr val="191923"/>
+                </a:solidFill>
+              </a:rPr>
+              <a:t>…</a:t>
+            </a:r>
+            <a:endParaRPr lang="en-US" sz="2400" dirty="0">
+              <a:solidFill>
+                <a:srgbClr val="191923"/>
+              </a:solidFill>
+            </a:endParaRPr>
+          </a:p>
+          <a:p>
+            <a:pPr marL="0" indent="0">
+              <a:buNone/>
+            </a:pPr>
+            <a:r>
+              <a:rPr lang="en-US" sz="2400" dirty="0">
+                <a:solidFill>
+                  <a:srgbClr val="191923"/>
+                </a:solidFill>
+              </a:rPr>
+              <a:t>Totals: 4 passed, 0 failed, 0 skipped</a:t>
+            </a:r>
+          </a:p>
+          <a:p>
+            <a:pPr marL="0" indent="0">
+              <a:buNone/>
+            </a:pPr>
+            <a:r>
+              <a:rPr lang="ru-RU" sz="2400" dirty="0">
+                <a:solidFill>
+                  <a:srgbClr val="191923"/>
+                </a:solidFill>
+              </a:rPr>
+              <a:t>*** </a:t>
+            </a:r>
+            <a:r>
+              <a:rPr lang="en-US" sz="2400" dirty="0">
+                <a:solidFill>
+                  <a:srgbClr val="191923"/>
+                </a:solidFill>
+              </a:rPr>
+              <a:t>Finished testing of </a:t>
+            </a:r>
+            <a:r>
+              <a:rPr lang="en-US" sz="2400" dirty="0" err="1">
+                <a:solidFill>
+                  <a:srgbClr val="191923"/>
+                </a:solidFill>
+              </a:rPr>
+              <a:t>TestLogs</a:t>
+            </a:r>
+            <a:r>
+              <a:rPr lang="ru-RU" sz="2400" dirty="0">
+                <a:solidFill>
+                  <a:srgbClr val="191923"/>
+                </a:solidFill>
+              </a:rPr>
+              <a:t> ***</a:t>
+            </a:r>
+            <a:endParaRPr lang="en-US" sz="2400" dirty="0">
+              <a:solidFill>
+                <a:srgbClr val="191923"/>
+              </a:solidFill>
+            </a:endParaRPr>
+          </a:p>
+          <a:p>
+            <a:pPr marL="0" indent="0">
+              <a:buNone/>
+            </a:pPr>
+            <a:r>
+              <a:rPr lang="ru-RU" sz="2400" dirty="0">
+                <a:solidFill>
+                  <a:srgbClr val="191923"/>
+                </a:solidFill>
+              </a:rPr>
+              <a:t>*** </a:t>
+            </a:r>
+            <a:r>
+              <a:rPr lang="en-US" sz="2400" dirty="0">
+                <a:solidFill>
+                  <a:srgbClr val="191923"/>
+                </a:solidFill>
+              </a:rPr>
+              <a:t>Start testing of </a:t>
+            </a:r>
+            <a:r>
+              <a:rPr lang="en-US" sz="2400" dirty="0" err="1">
+                <a:solidFill>
+                  <a:srgbClr val="191923"/>
+                </a:solidFill>
+              </a:rPr>
+              <a:t>TestSettings</a:t>
+            </a:r>
+            <a:r>
+              <a:rPr lang="ru-RU" sz="2400" dirty="0">
+                <a:solidFill>
+                  <a:srgbClr val="191923"/>
+                </a:solidFill>
+              </a:rPr>
+              <a:t> ***</a:t>
+            </a:r>
+            <a:r>
+              <a:rPr lang="en-US" sz="2400" dirty="0">
+                <a:solidFill>
+                  <a:srgbClr val="191923"/>
+                </a:solidFill>
+              </a:rPr>
+              <a:t> </a:t>
+            </a:r>
+            <a:endParaRPr lang="ru-RU" sz="2400" dirty="0">
+              <a:solidFill>
+                <a:srgbClr val="191923"/>
+              </a:solidFill>
+            </a:endParaRPr>
+          </a:p>
+          <a:p>
+            <a:pPr marL="0" indent="0">
+              <a:buNone/>
+            </a:pPr>
+            <a:r>
+              <a:rPr lang="ru-RU" sz="2400" dirty="0">
+                <a:solidFill>
+                  <a:srgbClr val="191923"/>
+                </a:solidFill>
+              </a:rPr>
+              <a:t>…</a:t>
+            </a:r>
+            <a:endParaRPr lang="en-US" sz="2400" dirty="0">
+              <a:solidFill>
+                <a:srgbClr val="191923"/>
+              </a:solidFill>
+            </a:endParaRPr>
+          </a:p>
+          <a:p>
+            <a:pPr marL="0" indent="0">
+              <a:buNone/>
+            </a:pPr>
+            <a:r>
+              <a:rPr lang="en-US" sz="2400" dirty="0">
+                <a:solidFill>
+                  <a:srgbClr val="191923"/>
+                </a:solidFill>
+              </a:rPr>
+              <a:t>Totals: 2 passed, 0 failed, 0 skipped</a:t>
+            </a:r>
+          </a:p>
+          <a:p>
+            <a:pPr marL="0" indent="0">
+              <a:buNone/>
+            </a:pPr>
+            <a:r>
+              <a:rPr lang="ru-RU" sz="2400" dirty="0">
+                <a:solidFill>
+                  <a:srgbClr val="191923"/>
+                </a:solidFill>
+              </a:rPr>
+              <a:t>*** </a:t>
+            </a:r>
+            <a:r>
+              <a:rPr lang="en-US" sz="2400" dirty="0">
+                <a:solidFill>
+                  <a:srgbClr val="191923"/>
+                </a:solidFill>
+              </a:rPr>
+              <a:t>Finished testing of </a:t>
+            </a:r>
+            <a:r>
+              <a:rPr lang="en-US" sz="2400" dirty="0" err="1">
+                <a:solidFill>
+                  <a:srgbClr val="191923"/>
+                </a:solidFill>
+              </a:rPr>
+              <a:t>TestSettings</a:t>
+            </a:r>
+            <a:r>
+              <a:rPr lang="ru-RU" sz="2400" dirty="0">
+                <a:solidFill>
+                  <a:srgbClr val="191923"/>
+                </a:solidFill>
+              </a:rPr>
+              <a:t> ***</a:t>
+            </a:r>
+            <a:endParaRPr lang="en-US" sz="2400" dirty="0">
+              <a:solidFill>
+                <a:srgbClr val="191923"/>
+              </a:solidFill>
+            </a:endParaRPr>
+          </a:p>
+          <a:p>
+            <a:pPr marL="0" indent="0">
+              <a:buNone/>
+            </a:pPr>
+            <a:r>
+              <a:rPr lang="ru-RU" sz="2400" dirty="0">
+                <a:solidFill>
+                  <a:srgbClr val="191923"/>
+                </a:solidFill>
+              </a:rPr>
+              <a:t>*** </a:t>
+            </a:r>
+            <a:r>
+              <a:rPr lang="en-US" sz="2400" dirty="0">
+                <a:solidFill>
+                  <a:srgbClr val="191923"/>
+                </a:solidFill>
+              </a:rPr>
+              <a:t>Start testing of </a:t>
+            </a:r>
+            <a:r>
+              <a:rPr lang="en-US" sz="2400" dirty="0" err="1">
+                <a:solidFill>
+                  <a:srgbClr val="191923"/>
+                </a:solidFill>
+              </a:rPr>
+              <a:t>TestTcpClient</a:t>
+            </a:r>
+            <a:r>
+              <a:rPr lang="ru-RU" sz="2400" dirty="0">
+                <a:solidFill>
+                  <a:srgbClr val="191923"/>
+                </a:solidFill>
+              </a:rPr>
+              <a:t> ***</a:t>
+            </a:r>
+            <a:r>
+              <a:rPr lang="en-US" sz="2400" dirty="0">
+                <a:solidFill>
+                  <a:srgbClr val="191923"/>
+                </a:solidFill>
+              </a:rPr>
+              <a:t> </a:t>
+            </a:r>
+            <a:endParaRPr lang="ru-RU" sz="2400" dirty="0">
+              <a:solidFill>
+                <a:srgbClr val="191923"/>
+              </a:solidFill>
+            </a:endParaRPr>
+          </a:p>
+          <a:p>
+            <a:pPr marL="0" indent="0">
+              <a:buNone/>
+            </a:pPr>
+            <a:r>
+              <a:rPr lang="ru-RU" sz="2400" dirty="0">
+                <a:solidFill>
+                  <a:srgbClr val="191923"/>
+                </a:solidFill>
+              </a:rPr>
+              <a:t>…</a:t>
+            </a:r>
+            <a:endParaRPr lang="en-US" sz="2400" dirty="0">
+              <a:solidFill>
+                <a:srgbClr val="191923"/>
+              </a:solidFill>
+            </a:endParaRPr>
+          </a:p>
+          <a:p>
+            <a:pPr marL="0" indent="0">
+              <a:buNone/>
+            </a:pPr>
+            <a:r>
+              <a:rPr lang="en-US" sz="2400" dirty="0">
+                <a:solidFill>
+                  <a:srgbClr val="191923"/>
+                </a:solidFill>
+              </a:rPr>
+              <a:t>Totals: 2 passed, 0 failed, 0 skipped</a:t>
+            </a:r>
+          </a:p>
+          <a:p>
+            <a:pPr marL="0" indent="0">
+              <a:buNone/>
+            </a:pPr>
+            <a:r>
+              <a:rPr lang="ru-RU" sz="2400" dirty="0">
+                <a:solidFill>
+                  <a:srgbClr val="191923"/>
+                </a:solidFill>
+              </a:rPr>
+              <a:t>*** </a:t>
+            </a:r>
+            <a:r>
+              <a:rPr lang="en-US" sz="2400" dirty="0">
+                <a:solidFill>
+                  <a:srgbClr val="191923"/>
+                </a:solidFill>
+              </a:rPr>
+              <a:t>Finished testing of </a:t>
+            </a:r>
+            <a:r>
+              <a:rPr lang="en-US" sz="2400" dirty="0" err="1">
+                <a:solidFill>
+                  <a:srgbClr val="191923"/>
+                </a:solidFill>
+              </a:rPr>
+              <a:t>TestTcpClient</a:t>
+            </a:r>
+            <a:r>
+              <a:rPr lang="ru-RU" sz="2400" dirty="0">
+                <a:solidFill>
+                  <a:srgbClr val="191923"/>
+                </a:solidFill>
+              </a:rPr>
+              <a:t> ***</a:t>
+            </a:r>
+          </a:p>
+        </p:txBody>
+      </p:sp>
+    </p:spTree>
+    <p:extLst>
+      <p:ext uri="{BB962C8B-B14F-4D97-AF65-F5344CB8AC3E}">
+        <p14:creationId xmlns:p14="http://schemas.microsoft.com/office/powerpoint/2010/main" val="1982774585"/>
+      </p:ext>
+    </p:extLst>
+  </p:cSld>
+  <p:clrMapOvr>
+    <a:masterClrMapping/>
+  </p:clrMapOvr>
+</p:sld>
+</file>
+
+<file path=ppt/slides/slide17.xml><?xml version="1.0" encoding="utf-8"?>
+<p:sld xmlns:a="http://schemas.openxmlformats.org/drawingml/2006/main" xmlns:r="http://schemas.openxmlformats.org/officeDocument/2006/relationships" xmlns:p="http://schemas.openxmlformats.org/presentationml/2006/main">
+  <p:cSld>
+    <p:spTree>
+      <p:nvGrpSpPr>
+        <p:cNvPr id="1" name=""/>
+        <p:cNvGrpSpPr/>
+        <p:nvPr/>
+      </p:nvGrpSpPr>
+      <p:grpSpPr>
+        <a:xfrm>
+          <a:off x="0" y="0"/>
+          <a:ext cx="0" cy="0"/>
+          <a:chOff x="0" y="0"/>
+          <a:chExt cx="0" cy="0"/>
+        </a:xfrm>
+      </p:grpSpPr>
+      <p:sp>
+        <p:nvSpPr>
+          <p:cNvPr id="2" name="Заголовок 1">
+            <a:extLst>
+              <a:ext uri="{FF2B5EF4-FFF2-40B4-BE49-F238E27FC236}">
+                <a16:creationId xmlns:a16="http://schemas.microsoft.com/office/drawing/2014/main" id="{59D1AF58-39E0-4A62-8895-0315872CF4F8}"/>
+              </a:ext>
+            </a:extLst>
+          </p:cNvPr>
+          <p:cNvSpPr>
+            <a:spLocks noGrp="1"/>
+          </p:cNvSpPr>
+          <p:nvPr>
+            <p:ph type="title"/>
+          </p:nvPr>
+        </p:nvSpPr>
         <p:spPr/>
         <p:txBody>
           <a:bodyPr/>
@@ -7430,12 +7983,42 @@
           </a:p>
         </p:txBody>
       </p:sp>
-      <p:sp>
-        <p:nvSpPr>
-          <p:cNvPr id="4" name="Заголовок 1">
-            <a:extLst>
-              <a:ext uri="{FF2B5EF4-FFF2-40B4-BE49-F238E27FC236}">
-                <a16:creationId xmlns:a16="http://schemas.microsoft.com/office/drawing/2014/main" id="{7532D0FB-CA22-4492-ADDB-4ADA488D836E}"/>
+    </p:spTree>
+    <p:extLst>
+      <p:ext uri="{BB962C8B-B14F-4D97-AF65-F5344CB8AC3E}">
+        <p14:creationId xmlns:p14="http://schemas.microsoft.com/office/powerpoint/2010/main" val="224470258"/>
+      </p:ext>
+    </p:extLst>
+  </p:cSld>
+  <p:clrMapOvr>
+    <a:masterClrMapping/>
+  </p:clrMapOvr>
+</p:sld>
+</file>
+
+<file path=ppt/slides/slide18.xml><?xml version="1.0" encoding="utf-8"?>
+<p:sld xmlns:a="http://schemas.openxmlformats.org/drawingml/2006/main" xmlns:r="http://schemas.openxmlformats.org/officeDocument/2006/relationships" xmlns:p="http://schemas.openxmlformats.org/presentationml/2006/main">
+  <p:cSld>
+    <p:spTree>
+      <p:nvGrpSpPr>
+        <p:cNvPr id="1" name=""/>
+        <p:cNvGrpSpPr/>
+        <p:nvPr/>
+      </p:nvGrpSpPr>
+      <p:grpSpPr>
+        <a:xfrm>
+          <a:off x="0" y="0"/>
+          <a:ext cx="0" cy="0"/>
+          <a:chOff x="0" y="0"/>
+          <a:chExt cx="0" cy="0"/>
+        </a:xfrm>
+      </p:grpSpPr>
+      <p:sp>
+        <p:nvSpPr>
+          <p:cNvPr id="2" name="Заголовок 1">
+            <a:extLst>
+              <a:ext uri="{FF2B5EF4-FFF2-40B4-BE49-F238E27FC236}">
+                <a16:creationId xmlns:a16="http://schemas.microsoft.com/office/drawing/2014/main" id="{41007FE3-11E2-465F-A4BD-E5EAD33C5E61}"/>
               </a:ext>
             </a:extLst>
           </p:cNvPr>
@@ -7446,7 +8029,7 @@
         </p:nvSpPr>
         <p:spPr>
           <a:xfrm>
-            <a:off x="838200" y="4579535"/>
+            <a:off x="838200" y="2766218"/>
             <a:ext cx="10515600" cy="1325563"/>
           </a:xfrm>
           <a:prstGeom prst="rect">
@@ -7479,7 +8062,7 @@
           <a:p>
             <a:pPr algn="ctr"/>
             <a:r>
-              <a:rPr lang="ru-RU" dirty="0">
+              <a:rPr lang="ru-RU" sz="6000" dirty="0">
                 <a:solidFill>
                   <a:srgbClr val="0F79B3"/>
                 </a:solidFill>
@@ -7493,7 +8076,7 @@
     </p:spTree>
     <p:extLst>
       <p:ext uri="{BB962C8B-B14F-4D97-AF65-F5344CB8AC3E}">
-        <p14:creationId xmlns:p14="http://schemas.microsoft.com/office/powerpoint/2010/main" val="224470258"/>
+        <p14:creationId xmlns:p14="http://schemas.microsoft.com/office/powerpoint/2010/main" val="1974193345"/>
       </p:ext>
     </p:extLst>
   </p:cSld>
@@ -9096,7 +9679,17 @@
                   <a:srgbClr val="191923"/>
                 </a:solidFill>
               </a:rPr>
-              <a:t>.</a:t>
+              <a:t>,</a:t>
+            </a:r>
+          </a:p>
+          <a:p>
+            <a:r>
+              <a:rPr lang="en-US" dirty="0">
+                <a:solidFill>
+                  <a:srgbClr val="191923"/>
+                </a:solidFill>
+              </a:rPr>
+              <a:t>Checks.</a:t>
             </a:r>
             <a:endParaRPr lang="ru-RU" dirty="0">
               <a:solidFill>
@@ -9128,14 +9721,13 @@
               </a:ext>
             </a:extLst>
           </a:blip>
-          <a:stretch>
-            <a:fillRect/>
-          </a:stretch>
+          <a:srcRect/>
+          <a:stretch/>
         </p:blipFill>
         <p:spPr>
           <a:xfrm>
-            <a:off x="5967663" y="1421870"/>
-            <a:ext cx="6031029" cy="5263688"/>
+            <a:off x="5967663" y="1442647"/>
+            <a:ext cx="6031029" cy="5222134"/>
           </a:xfrm>
           <a:prstGeom prst="rect">
             <a:avLst/>
